--- a/exports/pptx/lessons/senior-module-03-ayurveda-good-health/day-02-caraka.pptx
+++ b/exports/pptx/lessons/senior-module-03-ayurveda-good-health/day-02-caraka.pptx
@@ -14,9 +14,15 @@
     <p:sldId id="262" r:id="rId8"/>
     <p:sldId id="263" r:id="rId9"/>
     <p:sldId id="264" r:id="rId10"/>
+    <p:sldId id="265" r:id="rId11"/>
+    <p:sldId id="266" r:id="rId12"/>
+    <p:sldId id="267" r:id="rId13"/>
+    <p:sldId id="268" r:id="rId14"/>
+    <p:sldId id="269" r:id="rId15"/>
+    <p:sldId id="270" r:id="rId16"/>
   </p:sldIdLst>
   <p:notesMasterIdLst>
-    <p:notesMasterId r:id="rId11"/>
+    <p:notesMasterId r:id="rId17"/>
   </p:notesMasterIdLst>
   <p:sldSz cx="9144000" cy="5143500"/>
   <p:notesSz cx="5143500" cy="9144000"/>
@@ -534,6 +540,534 @@
             <a:fld id="{F7021451-1387-4CA6-816F-3879F97B5CBC}" type="slidenum">
               <a:rPr lang="en-US"/>
               <a:t>1</a:t>
+            </a:fld>
+            <a:endParaRPr lang="en-US"/>
+          </a:p>
+        </p:txBody>
+      </p:sp>
+    </p:spTree>
+    <p:extLst>
+      <p:ext uri="{BB962C8B-B14F-4D97-AF65-F5344CB8AC3E}">
+        <p14:creationId xmlns:p14="http://schemas.microsoft.com/office/powerpoint/2010/main" val="1024086991"/>
+      </p:ext>
+    </p:extLst>
+  </p:cSld>
+  <p:clrMapOvr>
+    <a:masterClrMapping/>
+  </p:clrMapOvr>
+</p:notes>
+</file>
+
+<file path=ppt/notesSlides/notesSlide10.xml><?xml version="1.0" encoding="utf-8"?>
+<p:notes xmlns:a="http://schemas.openxmlformats.org/drawingml/2006/main" xmlns:r="http://schemas.openxmlformats.org/officeDocument/2006/relationships" xmlns:p="http://schemas.openxmlformats.org/presentationml/2006/main">
+  <p:cSld>
+    <p:spTree>
+      <p:nvGrpSpPr>
+        <p:cNvPr id="1" name=""/>
+        <p:cNvGrpSpPr/>
+        <p:nvPr/>
+      </p:nvGrpSpPr>
+      <p:grpSpPr>
+        <a:xfrm>
+          <a:off x="0" y="0"/>
+          <a:ext cx="0" cy="0"/>
+          <a:chOff x="0" y="0"/>
+          <a:chExt cx="0" cy="0"/>
+        </a:xfrm>
+      </p:grpSpPr>
+      <p:sp>
+        <p:nvSpPr>
+          <p:cNvPr id="2" name="Slide Image Placeholder 1"/>
+          <p:cNvSpPr>
+            <a:spLocks noGrp="1" noRot="1" noChangeAspect="1"/>
+          </p:cNvSpPr>
+          <p:nvPr>
+            <p:ph type="sldImg"/>
+          </p:nvPr>
+        </p:nvSpPr>
+        <p:spPr/>
+      </p:sp>
+      <p:sp>
+        <p:nvSpPr>
+          <p:cNvPr id="3" name="Notes Placeholder 2"/>
+          <p:cNvSpPr>
+            <a:spLocks noGrp="1"/>
+          </p:cNvSpPr>
+          <p:nvPr>
+            <p:ph type="body" idx="1"/>
+          </p:nvPr>
+        </p:nvSpPr>
+        <p:spPr/>
+        <p:txBody>
+          <a:bodyPr/>
+          <a:lstStyle/>
+          <a:p>
+            <a:r>
+              <a:rPr lang="en-US" dirty="0"/>
+              <a:t/>
+            </a:r>
+            <a:endParaRPr lang="en-US" dirty="0"/>
+          </a:p>
+        </p:txBody>
+      </p:sp>
+      <p:sp>
+        <p:nvSpPr>
+          <p:cNvPr id="4" name="Slide Number Placeholder 3"/>
+          <p:cNvSpPr>
+            <a:spLocks noGrp="1"/>
+          </p:cNvSpPr>
+          <p:nvPr>
+            <p:ph type="sldNum" sz="quarter" idx="10"/>
+          </p:nvPr>
+        </p:nvSpPr>
+        <p:spPr/>
+        <p:txBody>
+          <a:bodyPr/>
+          <a:lstStyle/>
+          <a:p>
+            <a:fld id="{F7021451-1387-4CA6-816F-3879F97B5CBC}" type="slidenum">
+              <a:rPr lang="en-US"/>
+              <a:t>10</a:t>
+            </a:fld>
+            <a:endParaRPr lang="en-US"/>
+          </a:p>
+        </p:txBody>
+      </p:sp>
+    </p:spTree>
+    <p:extLst>
+      <p:ext uri="{BB962C8B-B14F-4D97-AF65-F5344CB8AC3E}">
+        <p14:creationId xmlns:p14="http://schemas.microsoft.com/office/powerpoint/2010/main" val="1024086991"/>
+      </p:ext>
+    </p:extLst>
+  </p:cSld>
+  <p:clrMapOvr>
+    <a:masterClrMapping/>
+  </p:clrMapOvr>
+</p:notes>
+</file>
+
+<file path=ppt/notesSlides/notesSlide11.xml><?xml version="1.0" encoding="utf-8"?>
+<p:notes xmlns:a="http://schemas.openxmlformats.org/drawingml/2006/main" xmlns:r="http://schemas.openxmlformats.org/officeDocument/2006/relationships" xmlns:p="http://schemas.openxmlformats.org/presentationml/2006/main">
+  <p:cSld>
+    <p:spTree>
+      <p:nvGrpSpPr>
+        <p:cNvPr id="1" name=""/>
+        <p:cNvGrpSpPr/>
+        <p:nvPr/>
+      </p:nvGrpSpPr>
+      <p:grpSpPr>
+        <a:xfrm>
+          <a:off x="0" y="0"/>
+          <a:ext cx="0" cy="0"/>
+          <a:chOff x="0" y="0"/>
+          <a:chExt cx="0" cy="0"/>
+        </a:xfrm>
+      </p:grpSpPr>
+      <p:sp>
+        <p:nvSpPr>
+          <p:cNvPr id="2" name="Slide Image Placeholder 1"/>
+          <p:cNvSpPr>
+            <a:spLocks noGrp="1" noRot="1" noChangeAspect="1"/>
+          </p:cNvSpPr>
+          <p:nvPr>
+            <p:ph type="sldImg"/>
+          </p:nvPr>
+        </p:nvSpPr>
+        <p:spPr/>
+      </p:sp>
+      <p:sp>
+        <p:nvSpPr>
+          <p:cNvPr id="3" name="Notes Placeholder 2"/>
+          <p:cNvSpPr>
+            <a:spLocks noGrp="1"/>
+          </p:cNvSpPr>
+          <p:nvPr>
+            <p:ph type="body" idx="1"/>
+          </p:nvPr>
+        </p:nvSpPr>
+        <p:spPr/>
+        <p:txBody>
+          <a:bodyPr/>
+          <a:lstStyle/>
+          <a:p>
+            <a:r>
+              <a:rPr lang="en-US" dirty="0"/>
+              <a:t/>
+            </a:r>
+            <a:endParaRPr lang="en-US" dirty="0"/>
+          </a:p>
+        </p:txBody>
+      </p:sp>
+      <p:sp>
+        <p:nvSpPr>
+          <p:cNvPr id="4" name="Slide Number Placeholder 3"/>
+          <p:cNvSpPr>
+            <a:spLocks noGrp="1"/>
+          </p:cNvSpPr>
+          <p:nvPr>
+            <p:ph type="sldNum" sz="quarter" idx="10"/>
+          </p:nvPr>
+        </p:nvSpPr>
+        <p:spPr/>
+        <p:txBody>
+          <a:bodyPr/>
+          <a:lstStyle/>
+          <a:p>
+            <a:fld id="{F7021451-1387-4CA6-816F-3879F97B5CBC}" type="slidenum">
+              <a:rPr lang="en-US"/>
+              <a:t>11</a:t>
+            </a:fld>
+            <a:endParaRPr lang="en-US"/>
+          </a:p>
+        </p:txBody>
+      </p:sp>
+    </p:spTree>
+    <p:extLst>
+      <p:ext uri="{BB962C8B-B14F-4D97-AF65-F5344CB8AC3E}">
+        <p14:creationId xmlns:p14="http://schemas.microsoft.com/office/powerpoint/2010/main" val="1024086991"/>
+      </p:ext>
+    </p:extLst>
+  </p:cSld>
+  <p:clrMapOvr>
+    <a:masterClrMapping/>
+  </p:clrMapOvr>
+</p:notes>
+</file>
+
+<file path=ppt/notesSlides/notesSlide12.xml><?xml version="1.0" encoding="utf-8"?>
+<p:notes xmlns:a="http://schemas.openxmlformats.org/drawingml/2006/main" xmlns:r="http://schemas.openxmlformats.org/officeDocument/2006/relationships" xmlns:p="http://schemas.openxmlformats.org/presentationml/2006/main">
+  <p:cSld>
+    <p:spTree>
+      <p:nvGrpSpPr>
+        <p:cNvPr id="1" name=""/>
+        <p:cNvGrpSpPr/>
+        <p:nvPr/>
+      </p:nvGrpSpPr>
+      <p:grpSpPr>
+        <a:xfrm>
+          <a:off x="0" y="0"/>
+          <a:ext cx="0" cy="0"/>
+          <a:chOff x="0" y="0"/>
+          <a:chExt cx="0" cy="0"/>
+        </a:xfrm>
+      </p:grpSpPr>
+      <p:sp>
+        <p:nvSpPr>
+          <p:cNvPr id="2" name="Slide Image Placeholder 1"/>
+          <p:cNvSpPr>
+            <a:spLocks noGrp="1" noRot="1" noChangeAspect="1"/>
+          </p:cNvSpPr>
+          <p:nvPr>
+            <p:ph type="sldImg"/>
+          </p:nvPr>
+        </p:nvSpPr>
+        <p:spPr/>
+      </p:sp>
+      <p:sp>
+        <p:nvSpPr>
+          <p:cNvPr id="3" name="Notes Placeholder 2"/>
+          <p:cNvSpPr>
+            <a:spLocks noGrp="1"/>
+          </p:cNvSpPr>
+          <p:nvPr>
+            <p:ph type="body" idx="1"/>
+          </p:nvPr>
+        </p:nvSpPr>
+        <p:spPr/>
+        <p:txBody>
+          <a:bodyPr/>
+          <a:lstStyle/>
+          <a:p>
+            <a:r>
+              <a:rPr lang="en-US" dirty="0"/>
+              <a:t/>
+            </a:r>
+            <a:endParaRPr lang="en-US" dirty="0"/>
+          </a:p>
+        </p:txBody>
+      </p:sp>
+      <p:sp>
+        <p:nvSpPr>
+          <p:cNvPr id="4" name="Slide Number Placeholder 3"/>
+          <p:cNvSpPr>
+            <a:spLocks noGrp="1"/>
+          </p:cNvSpPr>
+          <p:nvPr>
+            <p:ph type="sldNum" sz="quarter" idx="10"/>
+          </p:nvPr>
+        </p:nvSpPr>
+        <p:spPr/>
+        <p:txBody>
+          <a:bodyPr/>
+          <a:lstStyle/>
+          <a:p>
+            <a:fld id="{F7021451-1387-4CA6-816F-3879F97B5CBC}" type="slidenum">
+              <a:rPr lang="en-US"/>
+              <a:t>12</a:t>
+            </a:fld>
+            <a:endParaRPr lang="en-US"/>
+          </a:p>
+        </p:txBody>
+      </p:sp>
+    </p:spTree>
+    <p:extLst>
+      <p:ext uri="{BB962C8B-B14F-4D97-AF65-F5344CB8AC3E}">
+        <p14:creationId xmlns:p14="http://schemas.microsoft.com/office/powerpoint/2010/main" val="1024086991"/>
+      </p:ext>
+    </p:extLst>
+  </p:cSld>
+  <p:clrMapOvr>
+    <a:masterClrMapping/>
+  </p:clrMapOvr>
+</p:notes>
+</file>
+
+<file path=ppt/notesSlides/notesSlide13.xml><?xml version="1.0" encoding="utf-8"?>
+<p:notes xmlns:a="http://schemas.openxmlformats.org/drawingml/2006/main" xmlns:r="http://schemas.openxmlformats.org/officeDocument/2006/relationships" xmlns:p="http://schemas.openxmlformats.org/presentationml/2006/main">
+  <p:cSld>
+    <p:spTree>
+      <p:nvGrpSpPr>
+        <p:cNvPr id="1" name=""/>
+        <p:cNvGrpSpPr/>
+        <p:nvPr/>
+      </p:nvGrpSpPr>
+      <p:grpSpPr>
+        <a:xfrm>
+          <a:off x="0" y="0"/>
+          <a:ext cx="0" cy="0"/>
+          <a:chOff x="0" y="0"/>
+          <a:chExt cx="0" cy="0"/>
+        </a:xfrm>
+      </p:grpSpPr>
+      <p:sp>
+        <p:nvSpPr>
+          <p:cNvPr id="2" name="Slide Image Placeholder 1"/>
+          <p:cNvSpPr>
+            <a:spLocks noGrp="1" noRot="1" noChangeAspect="1"/>
+          </p:cNvSpPr>
+          <p:nvPr>
+            <p:ph type="sldImg"/>
+          </p:nvPr>
+        </p:nvSpPr>
+        <p:spPr/>
+      </p:sp>
+      <p:sp>
+        <p:nvSpPr>
+          <p:cNvPr id="3" name="Notes Placeholder 2"/>
+          <p:cNvSpPr>
+            <a:spLocks noGrp="1"/>
+          </p:cNvSpPr>
+          <p:nvPr>
+            <p:ph type="body" idx="1"/>
+          </p:nvPr>
+        </p:nvSpPr>
+        <p:spPr/>
+        <p:txBody>
+          <a:bodyPr/>
+          <a:lstStyle/>
+          <a:p>
+            <a:r>
+              <a:rPr lang="en-US" dirty="0"/>
+              <a:t/>
+            </a:r>
+            <a:endParaRPr lang="en-US" dirty="0"/>
+          </a:p>
+        </p:txBody>
+      </p:sp>
+      <p:sp>
+        <p:nvSpPr>
+          <p:cNvPr id="4" name="Slide Number Placeholder 3"/>
+          <p:cNvSpPr>
+            <a:spLocks noGrp="1"/>
+          </p:cNvSpPr>
+          <p:nvPr>
+            <p:ph type="sldNum" sz="quarter" idx="10"/>
+          </p:nvPr>
+        </p:nvSpPr>
+        <p:spPr/>
+        <p:txBody>
+          <a:bodyPr/>
+          <a:lstStyle/>
+          <a:p>
+            <a:fld id="{F7021451-1387-4CA6-816F-3879F97B5CBC}" type="slidenum">
+              <a:rPr lang="en-US"/>
+              <a:t>13</a:t>
+            </a:fld>
+            <a:endParaRPr lang="en-US"/>
+          </a:p>
+        </p:txBody>
+      </p:sp>
+    </p:spTree>
+    <p:extLst>
+      <p:ext uri="{BB962C8B-B14F-4D97-AF65-F5344CB8AC3E}">
+        <p14:creationId xmlns:p14="http://schemas.microsoft.com/office/powerpoint/2010/main" val="1024086991"/>
+      </p:ext>
+    </p:extLst>
+  </p:cSld>
+  <p:clrMapOvr>
+    <a:masterClrMapping/>
+  </p:clrMapOvr>
+</p:notes>
+</file>
+
+<file path=ppt/notesSlides/notesSlide14.xml><?xml version="1.0" encoding="utf-8"?>
+<p:notes xmlns:a="http://schemas.openxmlformats.org/drawingml/2006/main" xmlns:r="http://schemas.openxmlformats.org/officeDocument/2006/relationships" xmlns:p="http://schemas.openxmlformats.org/presentationml/2006/main">
+  <p:cSld>
+    <p:spTree>
+      <p:nvGrpSpPr>
+        <p:cNvPr id="1" name=""/>
+        <p:cNvGrpSpPr/>
+        <p:nvPr/>
+      </p:nvGrpSpPr>
+      <p:grpSpPr>
+        <a:xfrm>
+          <a:off x="0" y="0"/>
+          <a:ext cx="0" cy="0"/>
+          <a:chOff x="0" y="0"/>
+          <a:chExt cx="0" cy="0"/>
+        </a:xfrm>
+      </p:grpSpPr>
+      <p:sp>
+        <p:nvSpPr>
+          <p:cNvPr id="2" name="Slide Image Placeholder 1"/>
+          <p:cNvSpPr>
+            <a:spLocks noGrp="1" noRot="1" noChangeAspect="1"/>
+          </p:cNvSpPr>
+          <p:nvPr>
+            <p:ph type="sldImg"/>
+          </p:nvPr>
+        </p:nvSpPr>
+        <p:spPr/>
+      </p:sp>
+      <p:sp>
+        <p:nvSpPr>
+          <p:cNvPr id="3" name="Notes Placeholder 2"/>
+          <p:cNvSpPr>
+            <a:spLocks noGrp="1"/>
+          </p:cNvSpPr>
+          <p:nvPr>
+            <p:ph type="body" idx="1"/>
+          </p:nvPr>
+        </p:nvSpPr>
+        <p:spPr/>
+        <p:txBody>
+          <a:bodyPr/>
+          <a:lstStyle/>
+          <a:p>
+            <a:r>
+              <a:rPr lang="en-US" dirty="0"/>
+              <a:t/>
+            </a:r>
+            <a:endParaRPr lang="en-US" dirty="0"/>
+          </a:p>
+        </p:txBody>
+      </p:sp>
+      <p:sp>
+        <p:nvSpPr>
+          <p:cNvPr id="4" name="Slide Number Placeholder 3"/>
+          <p:cNvSpPr>
+            <a:spLocks noGrp="1"/>
+          </p:cNvSpPr>
+          <p:nvPr>
+            <p:ph type="sldNum" sz="quarter" idx="10"/>
+          </p:nvPr>
+        </p:nvSpPr>
+        <p:spPr/>
+        <p:txBody>
+          <a:bodyPr/>
+          <a:lstStyle/>
+          <a:p>
+            <a:fld id="{F7021451-1387-4CA6-816F-3879F97B5CBC}" type="slidenum">
+              <a:rPr lang="en-US"/>
+              <a:t>14</a:t>
+            </a:fld>
+            <a:endParaRPr lang="en-US"/>
+          </a:p>
+        </p:txBody>
+      </p:sp>
+    </p:spTree>
+    <p:extLst>
+      <p:ext uri="{BB962C8B-B14F-4D97-AF65-F5344CB8AC3E}">
+        <p14:creationId xmlns:p14="http://schemas.microsoft.com/office/powerpoint/2010/main" val="1024086991"/>
+      </p:ext>
+    </p:extLst>
+  </p:cSld>
+  <p:clrMapOvr>
+    <a:masterClrMapping/>
+  </p:clrMapOvr>
+</p:notes>
+</file>
+
+<file path=ppt/notesSlides/notesSlide15.xml><?xml version="1.0" encoding="utf-8"?>
+<p:notes xmlns:a="http://schemas.openxmlformats.org/drawingml/2006/main" xmlns:r="http://schemas.openxmlformats.org/officeDocument/2006/relationships" xmlns:p="http://schemas.openxmlformats.org/presentationml/2006/main">
+  <p:cSld>
+    <p:spTree>
+      <p:nvGrpSpPr>
+        <p:cNvPr id="1" name=""/>
+        <p:cNvGrpSpPr/>
+        <p:nvPr/>
+      </p:nvGrpSpPr>
+      <p:grpSpPr>
+        <a:xfrm>
+          <a:off x="0" y="0"/>
+          <a:ext cx="0" cy="0"/>
+          <a:chOff x="0" y="0"/>
+          <a:chExt cx="0" cy="0"/>
+        </a:xfrm>
+      </p:grpSpPr>
+      <p:sp>
+        <p:nvSpPr>
+          <p:cNvPr id="2" name="Slide Image Placeholder 1"/>
+          <p:cNvSpPr>
+            <a:spLocks noGrp="1" noRot="1" noChangeAspect="1"/>
+          </p:cNvSpPr>
+          <p:nvPr>
+            <p:ph type="sldImg"/>
+          </p:nvPr>
+        </p:nvSpPr>
+        <p:spPr/>
+      </p:sp>
+      <p:sp>
+        <p:nvSpPr>
+          <p:cNvPr id="3" name="Notes Placeholder 2"/>
+          <p:cNvSpPr>
+            <a:spLocks noGrp="1"/>
+          </p:cNvSpPr>
+          <p:nvPr>
+            <p:ph type="body" idx="1"/>
+          </p:nvPr>
+        </p:nvSpPr>
+        <p:spPr/>
+        <p:txBody>
+          <a:bodyPr/>
+          <a:lstStyle/>
+          <a:p>
+            <a:r>
+              <a:rPr lang="en-US" dirty="0"/>
+              <a:t/>
+            </a:r>
+            <a:endParaRPr lang="en-US" dirty="0"/>
+          </a:p>
+        </p:txBody>
+      </p:sp>
+      <p:sp>
+        <p:nvSpPr>
+          <p:cNvPr id="4" name="Slide Number Placeholder 3"/>
+          <p:cNvSpPr>
+            <a:spLocks noGrp="1"/>
+          </p:cNvSpPr>
+          <p:nvPr>
+            <p:ph type="sldNum" sz="quarter" idx="10"/>
+          </p:nvPr>
+        </p:nvSpPr>
+        <p:spPr/>
+        <p:txBody>
+          <a:bodyPr/>
+          <a:lstStyle/>
+          <a:p>
+            <a:fld id="{F7021451-1387-4CA6-816F-3879F97B5CBC}" type="slidenum">
+              <a:rPr lang="en-US"/>
+              <a:t>15</a:t>
             </a:fld>
             <a:endParaRPr lang="en-US"/>
           </a:p>
@@ -1787,7 +2321,117 @@
         </p:nvSpPr>
         <p:spPr>
           <a:xfrm>
-            <a:off x="406301" y="1223963"/>
+            <a:off x="406301" y="4434929"/>
+            <a:ext cx="8498026" cy="213271"/>
+          </a:xfrm>
+          <a:prstGeom prst="rect">
+            <a:avLst/>
+          </a:prstGeom>
+          <a:noFill/>
+          <a:ln/>
+        </p:spPr>
+        <p:txBody>
+          <a:bodyPr wrap="square" lIns="0" tIns="0" rIns="0" bIns="0" rtlCol="0" anchor="t"/>
+          <a:lstStyle/>
+          <a:p>
+            <a:pPr algn="l" indent="0" marL="0">
+              <a:lnSpc>
+                <a:spcPts val="1680"/>
+              </a:lnSpc>
+              <a:spcBef>
+                <a:spcPts val="300"/>
+              </a:spcBef>
+              <a:spcAft>
+                <a:spcPts val="300"/>
+              </a:spcAft>
+              <a:buNone/>
+            </a:pPr>
+            <a:r>
+              <a:rPr lang="en-US" sz="1200" dirty="0">
+                <a:solidFill>
+                  <a:srgbClr val="1A1A1A"/>
+                </a:solidFill>
+                <a:latin typeface="Georgia" pitchFamily="34" charset="0"/>
+                <a:ea typeface="Georgia" pitchFamily="34" charset="-122"/>
+                <a:cs typeface="Georgia" pitchFamily="34" charset="-120"/>
+              </a:rPr>
+              <a:t>Senior ·  · IKS Curriculum</a:t>
+            </a:r>
+            <a:endParaRPr lang="en-US" sz="1200" dirty="0"/>
+          </a:p>
+        </p:txBody>
+      </p:sp>
+    </p:spTree>
+  </p:cSld>
+  <p:clrMapOvr>
+    <a:masterClrMapping/>
+  </p:clrMapOvr>
+</p:sld>
+</file>
+
+<file path=ppt/slides/slide10.xml><?xml version="1.0" encoding="utf-8"?>
+<p:sld xmlns:a="http://schemas.openxmlformats.org/drawingml/2006/main" xmlns:r="http://schemas.openxmlformats.org/officeDocument/2006/relationships" xmlns:p="http://schemas.openxmlformats.org/presentationml/2006/main">
+  <p:cSld name="Slide 10">
+    <p:bg>
+      <p:bgPr>
+        <a:solidFill>
+          <a:srgbClr val="FAF7F2"/>
+        </a:solidFill>
+      </p:bgPr>
+    </p:bg>
+    <p:spTree>
+      <p:nvGrpSpPr>
+        <p:cNvPr id="1" name=""/>
+        <p:cNvGrpSpPr/>
+        <p:nvPr/>
+      </p:nvGrpSpPr>
+      <p:grpSpPr>
+        <a:xfrm>
+          <a:off x="0" y="0"/>
+          <a:ext cx="0" cy="0"/>
+          <a:chOff x="0" y="0"/>
+          <a:chExt cx="0" cy="0"/>
+        </a:xfrm>
+      </p:grpSpPr>
+      <p:sp>
+        <p:nvSpPr>
+          <p:cNvPr id="2" name="Text 0"/>
+          <p:cNvSpPr/>
+          <p:nvPr/>
+        </p:nvSpPr>
+        <p:spPr>
+          <a:xfrm>
+            <a:off x="0" y="0"/>
+            <a:ext cx="9144000" cy="101501"/>
+          </a:xfrm>
+          <a:prstGeom prst="rect">
+            <a:avLst/>
+          </a:prstGeom>
+          <a:solidFill>
+            <a:srgbClr val="5D1D2E"/>
+          </a:solidFill>
+          <a:ln/>
+        </p:spPr>
+        <p:txBody>
+          <a:bodyPr wrap="square" rtlCol="0" anchor="ctr"/>
+          <a:lstStyle/>
+          <a:p>
+            <a:pPr indent="0" marL="0">
+              <a:buNone/>
+            </a:pPr>
+            <a:endParaRPr lang="en-US" dirty="0"/>
+          </a:p>
+        </p:txBody>
+      </p:sp>
+      <p:sp>
+        <p:nvSpPr>
+          <p:cNvPr id="3" name="Text 1"/>
+          <p:cNvSpPr/>
+          <p:nvPr/>
+        </p:nvSpPr>
+        <p:spPr>
+          <a:xfrm>
+            <a:off x="406301" y="457051"/>
             <a:ext cx="8498026" cy="274290"/>
           </a:xfrm>
           <a:prstGeom prst="rect">
@@ -1821,9 +2465,165 @@
                 <a:ea typeface="Times New Roman" pitchFamily="34" charset="-122"/>
                 <a:cs typeface="Times New Roman" pitchFamily="34" charset="-120"/>
               </a:rPr>
-              <a:t>Learning objective</a:t>
+              <a:t>Reading (25 min) (cont.)</a:t>
             </a:r>
             <a:endParaRPr lang="en-US" sz="1800" dirty="0"/>
+          </a:p>
+        </p:txBody>
+      </p:sp>
+      <p:sp>
+        <p:nvSpPr>
+          <p:cNvPr id="4" name="Text 2"/>
+          <p:cNvSpPr/>
+          <p:nvPr/>
+        </p:nvSpPr>
+        <p:spPr>
+          <a:xfrm>
+            <a:off x="634901" y="883593"/>
+            <a:ext cx="8102798" cy="281880"/>
+          </a:xfrm>
+          <a:prstGeom prst="rect">
+            <a:avLst/>
+          </a:prstGeom>
+          <a:noFill/>
+          <a:ln/>
+        </p:spPr>
+        <p:txBody>
+          <a:bodyPr wrap="square" lIns="0" tIns="0" rIns="0" bIns="0" rtlCol="0" anchor="t"/>
+          <a:lstStyle/>
+          <a:p>
+            <a:pPr algn="l" marL="342900" indent="-342900">
+              <a:lnSpc>
+                <a:spcPts val="1620"/>
+              </a:lnSpc>
+              <a:spcAft>
+                <a:spcPts val="300"/>
+              </a:spcAft>
+              <a:buSzPct val="100000"/>
+              <a:buChar char="•"/>
+            </a:pPr>
+            <a:r>
+              <a:rPr lang="en-US" sz="1200" b="1" dirty="0">
+                <a:solidFill>
+                  <a:srgbClr val="1A1A1A"/>
+                </a:solidFill>
+                <a:latin typeface="Georgia" pitchFamily="34" charset="0"/>
+                <a:ea typeface="Georgia" pitchFamily="34" charset="-122"/>
+                <a:cs typeface="Georgia" pitchFamily="34" charset="-120"/>
+              </a:rPr>
+              <a:t>Discussion:</a:t>
+            </a:r>
+            <a:endParaRPr lang="en-US" sz="1200" dirty="0"/>
+          </a:p>
+        </p:txBody>
+      </p:sp>
+      <p:sp>
+        <p:nvSpPr>
+          <p:cNvPr id="5" name="Text 3"/>
+          <p:cNvSpPr/>
+          <p:nvPr/>
+        </p:nvSpPr>
+        <p:spPr>
+          <a:xfrm>
+            <a:off x="634901" y="1266974"/>
+            <a:ext cx="8102798" cy="525661"/>
+          </a:xfrm>
+          <a:prstGeom prst="rect">
+            <a:avLst/>
+          </a:prstGeom>
+          <a:noFill/>
+          <a:ln/>
+        </p:spPr>
+        <p:txBody>
+          <a:bodyPr wrap="square" lIns="0" tIns="0" rIns="0" bIns="0" rtlCol="0" anchor="t"/>
+          <a:lstStyle/>
+          <a:p>
+            <a:pPr algn="l" marL="342900" indent="-342900">
+              <a:lnSpc>
+                <a:spcPts val="1620"/>
+              </a:lnSpc>
+              <a:spcAft>
+                <a:spcPts val="300"/>
+              </a:spcAft>
+              <a:buSzPct val="100000"/>
+              <a:buChar char="•"/>
+            </a:pPr>
+            <a:r>
+              <a:rPr lang="en-US" sz="1200" dirty="0">
+                <a:solidFill>
+                  <a:srgbClr val="1A1A1A"/>
+                </a:solidFill>
+                <a:latin typeface="Georgia" pitchFamily="34" charset="0"/>
+                <a:ea typeface="Georgia" pitchFamily="34" charset="-122"/>
+                <a:cs typeface="Georgia" pitchFamily="34" charset="-120"/>
+              </a:rPr>
+              <a:t>How does Caraka's 4-component āyu compare with the modern biomedical view of "life"?</a:t>
+            </a:r>
+            <a:endParaRPr lang="en-US" sz="1200" dirty="0"/>
+          </a:p>
+          <a:p>
+            <a:pPr algn="l" marL="342900" indent="-342900">
+              <a:lnSpc>
+                <a:spcPts val="1620"/>
+              </a:lnSpc>
+              <a:spcAft>
+                <a:spcPts val="300"/>
+              </a:spcAft>
+              <a:buSzPct val="100000"/>
+              <a:buChar char="•"/>
+            </a:pPr>
+            <a:r>
+              <a:rPr lang="en-US" sz="1200" dirty="0">
+                <a:solidFill>
+                  <a:srgbClr val="1A1A1A"/>
+                </a:solidFill>
+                <a:latin typeface="Georgia" pitchFamily="34" charset="0"/>
+                <a:ea typeface="Georgia" pitchFamily="34" charset="-122"/>
+                <a:cs typeface="Georgia" pitchFamily="34" charset="-120"/>
+              </a:rPr>
+              <a:t>The pramāṇa framework predates Aristotle's </a:t>
+            </a:r>
+            <a:pPr algn="l" indent="0" marL="0">
+              <a:lnSpc>
+                <a:spcPts val="1620"/>
+              </a:lnSpc>
+              <a:spcAft>
+                <a:spcPts val="300"/>
+              </a:spcAft>
+              <a:buNone/>
+            </a:pPr>
+            <a:r>
+              <a:rPr lang="en-US" sz="1200" i="1" dirty="0">
+                <a:solidFill>
+                  <a:srgbClr val="1A1A1A"/>
+                </a:solidFill>
+                <a:latin typeface="Georgia" pitchFamily="34" charset="0"/>
+                <a:ea typeface="Georgia" pitchFamily="34" charset="-122"/>
+                <a:cs typeface="Georgia" pitchFamily="34" charset="-120"/>
+              </a:rPr>
+              <a:t>Posterior Analytics</a:t>
+            </a:r>
+            <a:pPr algn="l" indent="0" marL="0">
+              <a:lnSpc>
+                <a:spcPts val="1620"/>
+              </a:lnSpc>
+              <a:spcAft>
+                <a:spcPts val="300"/>
+              </a:spcAft>
+              <a:buNone/>
+            </a:pPr>
+            <a:r>
+              <a:rPr lang="en-US" sz="1200" dirty="0">
+                <a:solidFill>
+                  <a:srgbClr val="1A1A1A"/>
+                </a:solidFill>
+                <a:latin typeface="Georgia" pitchFamily="34" charset="0"/>
+                <a:ea typeface="Georgia" pitchFamily="34" charset="-122"/>
+                <a:cs typeface="Georgia" pitchFamily="34" charset="-120"/>
+              </a:rPr>
+              <a:t> in important ways. Compare.</a:t>
+            </a:r>
+            <a:endParaRPr lang="en-US" sz="1200" dirty="0"/>
           </a:p>
         </p:txBody>
       </p:sp>
@@ -1835,8 +2635,8 @@
         </p:nvSpPr>
         <p:spPr>
           <a:xfrm>
-            <a:off x="406301" y="1637854"/>
-            <a:ext cx="8498026" cy="426541"/>
+            <a:off x="406301" y="4434929"/>
+            <a:ext cx="8498026" cy="213271"/>
           </a:xfrm>
           <a:prstGeom prst="rect">
             <a:avLst/>
@@ -1869,8 +2669,143 @@
                 <a:ea typeface="Georgia" pitchFamily="34" charset="-122"/>
                 <a:cs typeface="Georgia" pitchFamily="34" charset="-120"/>
               </a:rPr>
-              <a:t>Students read selected verses from Caraka Saṃhitā Sūtra-sthāna in IAST + translation, identifying Caraka's definition of </a:t>
-            </a:r>
+              <a:t>Senior ·  · IKS Curriculum</a:t>
+            </a:r>
+            <a:endParaRPr lang="en-US" sz="1200" dirty="0"/>
+          </a:p>
+        </p:txBody>
+      </p:sp>
+    </p:spTree>
+  </p:cSld>
+  <p:clrMapOvr>
+    <a:masterClrMapping/>
+  </p:clrMapOvr>
+</p:sld>
+</file>
+
+<file path=ppt/slides/slide11.xml><?xml version="1.0" encoding="utf-8"?>
+<p:sld xmlns:a="http://schemas.openxmlformats.org/drawingml/2006/main" xmlns:r="http://schemas.openxmlformats.org/officeDocument/2006/relationships" xmlns:p="http://schemas.openxmlformats.org/presentationml/2006/main">
+  <p:cSld name="Slide 11">
+    <p:bg>
+      <p:bgPr>
+        <a:solidFill>
+          <a:srgbClr val="FAF7F2"/>
+        </a:solidFill>
+      </p:bgPr>
+    </p:bg>
+    <p:spTree>
+      <p:nvGrpSpPr>
+        <p:cNvPr id="1" name=""/>
+        <p:cNvGrpSpPr/>
+        <p:nvPr/>
+      </p:nvGrpSpPr>
+      <p:grpSpPr>
+        <a:xfrm>
+          <a:off x="0" y="0"/>
+          <a:ext cx="0" cy="0"/>
+          <a:chOff x="0" y="0"/>
+          <a:chExt cx="0" cy="0"/>
+        </a:xfrm>
+      </p:grpSpPr>
+      <p:sp>
+        <p:nvSpPr>
+          <p:cNvPr id="2" name="Text 0"/>
+          <p:cNvSpPr/>
+          <p:nvPr/>
+        </p:nvSpPr>
+        <p:spPr>
+          <a:xfrm>
+            <a:off x="0" y="0"/>
+            <a:ext cx="9144000" cy="101501"/>
+          </a:xfrm>
+          <a:prstGeom prst="rect">
+            <a:avLst/>
+          </a:prstGeom>
+          <a:solidFill>
+            <a:srgbClr val="5D1D2E"/>
+          </a:solidFill>
+          <a:ln/>
+        </p:spPr>
+        <p:txBody>
+          <a:bodyPr wrap="square" rtlCol="0" anchor="ctr"/>
+          <a:lstStyle/>
+          <a:p>
+            <a:pPr indent="0" marL="0">
+              <a:buNone/>
+            </a:pPr>
+            <a:endParaRPr lang="en-US" dirty="0"/>
+          </a:p>
+        </p:txBody>
+      </p:sp>
+      <p:sp>
+        <p:nvSpPr>
+          <p:cNvPr id="3" name="Text 1"/>
+          <p:cNvSpPr/>
+          <p:nvPr/>
+        </p:nvSpPr>
+        <p:spPr>
+          <a:xfrm>
+            <a:off x="406301" y="457051"/>
+            <a:ext cx="8498026" cy="274290"/>
+          </a:xfrm>
+          <a:prstGeom prst="rect">
+            <a:avLst/>
+          </a:prstGeom>
+          <a:noFill/>
+          <a:ln/>
+        </p:spPr>
+        <p:txBody>
+          <a:bodyPr wrap="square" lIns="0" tIns="0" rIns="0" bIns="0" rtlCol="0" anchor="t"/>
+          <a:lstStyle/>
+          <a:p>
+            <a:pPr algn="l" indent="0" marL="0">
+              <a:lnSpc>
+                <a:spcPts val="2160"/>
+              </a:lnSpc>
+              <a:spcBef>
+                <a:spcPts val="600"/>
+              </a:spcBef>
+              <a:spcAft>
+                <a:spcPts val="800"/>
+              </a:spcAft>
+              <a:buNone/>
+            </a:pPr>
+            <a:r>
+              <a:rPr lang="en-US" sz="1800" b="1" dirty="0">
+                <a:solidFill>
+                  <a:srgbClr val="997929"/>
+                </a:solidFill>
+                <a:latin typeface="Times New Roman" pitchFamily="34" charset="0"/>
+                <a:ea typeface="Times New Roman" pitchFamily="34" charset="-122"/>
+                <a:cs typeface="Times New Roman" pitchFamily="34" charset="-120"/>
+              </a:rPr>
+              <a:t>Activity (10 min)</a:t>
+            </a:r>
+            <a:endParaRPr lang="en-US" sz="1800" dirty="0"/>
+          </a:p>
+        </p:txBody>
+      </p:sp>
+      <p:sp>
+        <p:nvSpPr>
+          <p:cNvPr id="4" name="Text 2"/>
+          <p:cNvSpPr/>
+          <p:nvPr/>
+        </p:nvSpPr>
+        <p:spPr>
+          <a:xfrm>
+            <a:off x="406301" y="870942"/>
+            <a:ext cx="8498026" cy="213271"/>
+          </a:xfrm>
+          <a:prstGeom prst="rect">
+            <a:avLst/>
+          </a:prstGeom>
+          <a:noFill/>
+          <a:ln/>
+        </p:spPr>
+        <p:txBody>
+          <a:bodyPr wrap="square" lIns="0" tIns="0" rIns="0" bIns="0" rtlCol="0" anchor="t"/>
+          <a:lstStyle/>
+          <a:p>
             <a:pPr algn="l" indent="0" marL="0">
               <a:lnSpc>
                 <a:spcPts val="1680"/>
@@ -1884,6 +2819,230 @@
               <a:buNone/>
             </a:pPr>
             <a:r>
+              <a:rPr lang="en-US" sz="1200" dirty="0">
+                <a:solidFill>
+                  <a:srgbClr val="1A1A1A"/>
+                </a:solidFill>
+                <a:latin typeface="Georgia" pitchFamily="34" charset="0"/>
+                <a:ea typeface="Georgia" pitchFamily="34" charset="-122"/>
+                <a:cs typeface="Georgia" pitchFamily="34" charset="-120"/>
+              </a:rPr>
+              <a:t>Quiet reading. Students annotate the verse handout. Note one question.</a:t>
+            </a:r>
+            <a:endParaRPr lang="en-US" sz="1200" dirty="0"/>
+          </a:p>
+        </p:txBody>
+      </p:sp>
+      <p:sp>
+        <p:nvSpPr>
+          <p:cNvPr id="5" name="Text 3"/>
+          <p:cNvSpPr/>
+          <p:nvPr/>
+        </p:nvSpPr>
+        <p:spPr>
+          <a:xfrm>
+            <a:off x="406301" y="4434929"/>
+            <a:ext cx="8498026" cy="213271"/>
+          </a:xfrm>
+          <a:prstGeom prst="rect">
+            <a:avLst/>
+          </a:prstGeom>
+          <a:noFill/>
+          <a:ln/>
+        </p:spPr>
+        <p:txBody>
+          <a:bodyPr wrap="square" lIns="0" tIns="0" rIns="0" bIns="0" rtlCol="0" anchor="t"/>
+          <a:lstStyle/>
+          <a:p>
+            <a:pPr algn="l" indent="0" marL="0">
+              <a:lnSpc>
+                <a:spcPts val="1680"/>
+              </a:lnSpc>
+              <a:spcBef>
+                <a:spcPts val="300"/>
+              </a:spcBef>
+              <a:spcAft>
+                <a:spcPts val="300"/>
+              </a:spcAft>
+              <a:buNone/>
+            </a:pPr>
+            <a:r>
+              <a:rPr lang="en-US" sz="1200" dirty="0">
+                <a:solidFill>
+                  <a:srgbClr val="1A1A1A"/>
+                </a:solidFill>
+                <a:latin typeface="Georgia" pitchFamily="34" charset="0"/>
+                <a:ea typeface="Georgia" pitchFamily="34" charset="-122"/>
+                <a:cs typeface="Georgia" pitchFamily="34" charset="-120"/>
+              </a:rPr>
+              <a:t>Senior ·  · IKS Curriculum</a:t>
+            </a:r>
+            <a:endParaRPr lang="en-US" sz="1200" dirty="0"/>
+          </a:p>
+        </p:txBody>
+      </p:sp>
+    </p:spTree>
+  </p:cSld>
+  <p:clrMapOvr>
+    <a:masterClrMapping/>
+  </p:clrMapOvr>
+</p:sld>
+</file>
+
+<file path=ppt/slides/slide12.xml><?xml version="1.0" encoding="utf-8"?>
+<p:sld xmlns:a="http://schemas.openxmlformats.org/drawingml/2006/main" xmlns:r="http://schemas.openxmlformats.org/officeDocument/2006/relationships" xmlns:p="http://schemas.openxmlformats.org/presentationml/2006/main">
+  <p:cSld name="Slide 12">
+    <p:bg>
+      <p:bgPr>
+        <a:solidFill>
+          <a:srgbClr val="FAF7F2"/>
+        </a:solidFill>
+      </p:bgPr>
+    </p:bg>
+    <p:spTree>
+      <p:nvGrpSpPr>
+        <p:cNvPr id="1" name=""/>
+        <p:cNvGrpSpPr/>
+        <p:nvPr/>
+      </p:nvGrpSpPr>
+      <p:grpSpPr>
+        <a:xfrm>
+          <a:off x="0" y="0"/>
+          <a:ext cx="0" cy="0"/>
+          <a:chOff x="0" y="0"/>
+          <a:chExt cx="0" cy="0"/>
+        </a:xfrm>
+      </p:grpSpPr>
+      <p:sp>
+        <p:nvSpPr>
+          <p:cNvPr id="2" name="Text 0"/>
+          <p:cNvSpPr/>
+          <p:nvPr/>
+        </p:nvSpPr>
+        <p:spPr>
+          <a:xfrm>
+            <a:off x="0" y="0"/>
+            <a:ext cx="9144000" cy="101501"/>
+          </a:xfrm>
+          <a:prstGeom prst="rect">
+            <a:avLst/>
+          </a:prstGeom>
+          <a:solidFill>
+            <a:srgbClr val="5D1D2E"/>
+          </a:solidFill>
+          <a:ln/>
+        </p:spPr>
+        <p:txBody>
+          <a:bodyPr wrap="square" rtlCol="0" anchor="ctr"/>
+          <a:lstStyle/>
+          <a:p>
+            <a:pPr indent="0" marL="0">
+              <a:buNone/>
+            </a:pPr>
+            <a:endParaRPr lang="en-US" dirty="0"/>
+          </a:p>
+        </p:txBody>
+      </p:sp>
+      <p:sp>
+        <p:nvSpPr>
+          <p:cNvPr id="3" name="Text 1"/>
+          <p:cNvSpPr/>
+          <p:nvPr/>
+        </p:nvSpPr>
+        <p:spPr>
+          <a:xfrm>
+            <a:off x="406301" y="457051"/>
+            <a:ext cx="8498026" cy="274290"/>
+          </a:xfrm>
+          <a:prstGeom prst="rect">
+            <a:avLst/>
+          </a:prstGeom>
+          <a:noFill/>
+          <a:ln/>
+        </p:spPr>
+        <p:txBody>
+          <a:bodyPr wrap="square" lIns="0" tIns="0" rIns="0" bIns="0" rtlCol="0" anchor="t"/>
+          <a:lstStyle/>
+          <a:p>
+            <a:pPr algn="l" indent="0" marL="0">
+              <a:lnSpc>
+                <a:spcPts val="2160"/>
+              </a:lnSpc>
+              <a:spcBef>
+                <a:spcPts val="600"/>
+              </a:spcBef>
+              <a:spcAft>
+                <a:spcPts val="800"/>
+              </a:spcAft>
+              <a:buNone/>
+            </a:pPr>
+            <a:r>
+              <a:rPr lang="en-US" sz="1800" b="1" dirty="0">
+                <a:solidFill>
+                  <a:srgbClr val="997929"/>
+                </a:solidFill>
+                <a:latin typeface="Times New Roman" pitchFamily="34" charset="0"/>
+                <a:ea typeface="Times New Roman" pitchFamily="34" charset="-122"/>
+                <a:cs typeface="Times New Roman" pitchFamily="34" charset="-120"/>
+              </a:rPr>
+              <a:t>Wrap-up (5 min)</a:t>
+            </a:r>
+            <a:endParaRPr lang="en-US" sz="1800" dirty="0"/>
+          </a:p>
+        </p:txBody>
+      </p:sp>
+      <p:sp>
+        <p:nvSpPr>
+          <p:cNvPr id="4" name="Text 2"/>
+          <p:cNvSpPr/>
+          <p:nvPr/>
+        </p:nvSpPr>
+        <p:spPr>
+          <a:xfrm>
+            <a:off x="634901" y="883593"/>
+            <a:ext cx="8102798" cy="281880"/>
+          </a:xfrm>
+          <a:prstGeom prst="rect">
+            <a:avLst/>
+          </a:prstGeom>
+          <a:noFill/>
+          <a:ln/>
+        </p:spPr>
+        <p:txBody>
+          <a:bodyPr wrap="square" lIns="0" tIns="0" rIns="0" bIns="0" rtlCol="0" anchor="t"/>
+          <a:lstStyle/>
+          <a:p>
+            <a:pPr algn="l" marL="342900" indent="-342900">
+              <a:lnSpc>
+                <a:spcPts val="1620"/>
+              </a:lnSpc>
+              <a:spcAft>
+                <a:spcPts val="300"/>
+              </a:spcAft>
+              <a:buSzPct val="100000"/>
+              <a:buChar char="•"/>
+            </a:pPr>
+            <a:r>
+              <a:rPr lang="en-US" sz="1200" dirty="0">
+                <a:solidFill>
+                  <a:srgbClr val="1A1A1A"/>
+                </a:solidFill>
+                <a:latin typeface="Georgia" pitchFamily="34" charset="0"/>
+                <a:ea typeface="Georgia" pitchFamily="34" charset="-122"/>
+                <a:cs typeface="Georgia" pitchFamily="34" charset="-120"/>
+              </a:rPr>
+              <a:t>Preview Day 3: </a:t>
+            </a:r>
+            <a:pPr algn="l" indent="0" marL="0">
+              <a:lnSpc>
+                <a:spcPts val="1620"/>
+              </a:lnSpc>
+              <a:spcAft>
+                <a:spcPts val="300"/>
+              </a:spcAft>
+              <a:buNone/>
+            </a:pPr>
+            <a:r>
               <a:rPr lang="en-US" sz="1200" i="1" dirty="0">
                 <a:solidFill>
                   <a:srgbClr val="1A1A1A"/>
@@ -1892,10 +3051,343 @@
                 <a:ea typeface="Georgia" pitchFamily="34" charset="-122"/>
                 <a:cs typeface="Georgia" pitchFamily="34" charset="-120"/>
               </a:rPr>
+              <a:t>"Tomorrow — Tridosha theory in classical depth + modern engagement."</a:t>
+            </a:r>
+            <a:endParaRPr lang="en-US" sz="1200" dirty="0"/>
+          </a:p>
+        </p:txBody>
+      </p:sp>
+      <p:sp>
+        <p:nvSpPr>
+          <p:cNvPr id="5" name="Text 3"/>
+          <p:cNvSpPr/>
+          <p:nvPr/>
+        </p:nvSpPr>
+        <p:spPr>
+          <a:xfrm>
+            <a:off x="406301" y="4434929"/>
+            <a:ext cx="8498026" cy="213271"/>
+          </a:xfrm>
+          <a:prstGeom prst="rect">
+            <a:avLst/>
+          </a:prstGeom>
+          <a:noFill/>
+          <a:ln/>
+        </p:spPr>
+        <p:txBody>
+          <a:bodyPr wrap="square" lIns="0" tIns="0" rIns="0" bIns="0" rtlCol="0" anchor="t"/>
+          <a:lstStyle/>
+          <a:p>
+            <a:pPr algn="l" indent="0" marL="0">
+              <a:lnSpc>
+                <a:spcPts val="1680"/>
+              </a:lnSpc>
+              <a:spcBef>
+                <a:spcPts val="300"/>
+              </a:spcBef>
+              <a:spcAft>
+                <a:spcPts val="300"/>
+              </a:spcAft>
+              <a:buNone/>
+            </a:pPr>
+            <a:r>
+              <a:rPr lang="en-US" sz="1200" dirty="0">
+                <a:solidFill>
+                  <a:srgbClr val="1A1A1A"/>
+                </a:solidFill>
+                <a:latin typeface="Georgia" pitchFamily="34" charset="0"/>
+                <a:ea typeface="Georgia" pitchFamily="34" charset="-122"/>
+                <a:cs typeface="Georgia" pitchFamily="34" charset="-120"/>
+              </a:rPr>
+              <a:t>Senior ·  · IKS Curriculum</a:t>
+            </a:r>
+            <a:endParaRPr lang="en-US" sz="1200" dirty="0"/>
+          </a:p>
+        </p:txBody>
+      </p:sp>
+    </p:spTree>
+  </p:cSld>
+  <p:clrMapOvr>
+    <a:masterClrMapping/>
+  </p:clrMapOvr>
+</p:sld>
+</file>
+
+<file path=ppt/slides/slide13.xml><?xml version="1.0" encoding="utf-8"?>
+<p:sld xmlns:a="http://schemas.openxmlformats.org/drawingml/2006/main" xmlns:r="http://schemas.openxmlformats.org/officeDocument/2006/relationships" xmlns:p="http://schemas.openxmlformats.org/presentationml/2006/main">
+  <p:cSld name="Slide 13">
+    <p:bg>
+      <p:bgPr>
+        <a:solidFill>
+          <a:srgbClr val="FAF7F2"/>
+        </a:solidFill>
+      </p:bgPr>
+    </p:bg>
+    <p:spTree>
+      <p:nvGrpSpPr>
+        <p:cNvPr id="1" name=""/>
+        <p:cNvGrpSpPr/>
+        <p:nvPr/>
+      </p:nvGrpSpPr>
+      <p:grpSpPr>
+        <a:xfrm>
+          <a:off x="0" y="0"/>
+          <a:ext cx="0" cy="0"/>
+          <a:chOff x="0" y="0"/>
+          <a:chExt cx="0" cy="0"/>
+        </a:xfrm>
+      </p:grpSpPr>
+      <p:sp>
+        <p:nvSpPr>
+          <p:cNvPr id="2" name="Text 0"/>
+          <p:cNvSpPr/>
+          <p:nvPr/>
+        </p:nvSpPr>
+        <p:spPr>
+          <a:xfrm>
+            <a:off x="0" y="0"/>
+            <a:ext cx="9144000" cy="101501"/>
+          </a:xfrm>
+          <a:prstGeom prst="rect">
+            <a:avLst/>
+          </a:prstGeom>
+          <a:solidFill>
+            <a:srgbClr val="5D1D2E"/>
+          </a:solidFill>
+          <a:ln/>
+        </p:spPr>
+        <p:txBody>
+          <a:bodyPr wrap="square" rtlCol="0" anchor="ctr"/>
+          <a:lstStyle/>
+          <a:p>
+            <a:pPr indent="0" marL="0">
+              <a:buNone/>
+            </a:pPr>
+            <a:endParaRPr lang="en-US" dirty="0"/>
+          </a:p>
+        </p:txBody>
+      </p:sp>
+      <p:sp>
+        <p:nvSpPr>
+          <p:cNvPr id="3" name="Text 1"/>
+          <p:cNvSpPr/>
+          <p:nvPr/>
+        </p:nvSpPr>
+        <p:spPr>
+          <a:xfrm>
+            <a:off x="406301" y="457051"/>
+            <a:ext cx="8498026" cy="274290"/>
+          </a:xfrm>
+          <a:prstGeom prst="rect">
+            <a:avLst/>
+          </a:prstGeom>
+          <a:noFill/>
+          <a:ln/>
+        </p:spPr>
+        <p:txBody>
+          <a:bodyPr wrap="square" lIns="0" tIns="0" rIns="0" bIns="0" rtlCol="0" anchor="t"/>
+          <a:lstStyle/>
+          <a:p>
+            <a:pPr algn="l" indent="0" marL="0">
+              <a:lnSpc>
+                <a:spcPts val="2160"/>
+              </a:lnSpc>
+              <a:spcBef>
+                <a:spcPts val="600"/>
+              </a:spcBef>
+              <a:spcAft>
+                <a:spcPts val="800"/>
+              </a:spcAft>
+              <a:buNone/>
+            </a:pPr>
+            <a:r>
+              <a:rPr lang="en-US" sz="1800" b="1" dirty="0">
+                <a:solidFill>
+                  <a:srgbClr val="997929"/>
+                </a:solidFill>
+                <a:latin typeface="Times New Roman" pitchFamily="34" charset="0"/>
+                <a:ea typeface="Times New Roman" pitchFamily="34" charset="-122"/>
+                <a:cs typeface="Times New Roman" pitchFamily="34" charset="-120"/>
+              </a:rPr>
+              <a:t>Differentiation</a:t>
+            </a:r>
+            <a:endParaRPr lang="en-US" sz="1800" dirty="0"/>
+          </a:p>
+        </p:txBody>
+      </p:sp>
+      <p:sp>
+        <p:nvSpPr>
+          <p:cNvPr id="4" name="Text 2"/>
+          <p:cNvSpPr/>
+          <p:nvPr/>
+        </p:nvSpPr>
+        <p:spPr>
+          <a:xfrm>
+            <a:off x="634901" y="883593"/>
+            <a:ext cx="8102798" cy="525661"/>
+          </a:xfrm>
+          <a:prstGeom prst="rect">
+            <a:avLst/>
+          </a:prstGeom>
+          <a:noFill/>
+          <a:ln/>
+        </p:spPr>
+        <p:txBody>
+          <a:bodyPr wrap="square" lIns="0" tIns="0" rIns="0" bIns="0" rtlCol="0" anchor="t"/>
+          <a:lstStyle/>
+          <a:p>
+            <a:pPr algn="l" marL="342900" indent="-342900">
+              <a:lnSpc>
+                <a:spcPts val="1620"/>
+              </a:lnSpc>
+              <a:spcAft>
+                <a:spcPts val="300"/>
+              </a:spcAft>
+              <a:buSzPct val="100000"/>
+              <a:buChar char="•"/>
+            </a:pPr>
+            <a:r>
+              <a:rPr lang="en-US" sz="1200" b="1" dirty="0">
+                <a:solidFill>
+                  <a:srgbClr val="1A1A1A"/>
+                </a:solidFill>
+                <a:latin typeface="Georgia" pitchFamily="34" charset="0"/>
+                <a:ea typeface="Georgia" pitchFamily="34" charset="-122"/>
+                <a:cs typeface="Georgia" pitchFamily="34" charset="-120"/>
+              </a:rPr>
+              <a:t>Tier up:</a:t>
+            </a:r>
+            <a:pPr algn="l" indent="0" marL="0">
+              <a:lnSpc>
+                <a:spcPts val="1620"/>
+              </a:lnSpc>
+              <a:spcAft>
+                <a:spcPts val="300"/>
+              </a:spcAft>
+              <a:buNone/>
+            </a:pPr>
+            <a:r>
+              <a:rPr lang="en-US" sz="1200" dirty="0">
+                <a:solidFill>
+                  <a:srgbClr val="1A1A1A"/>
+                </a:solidFill>
+                <a:latin typeface="Georgia" pitchFamily="34" charset="0"/>
+                <a:ea typeface="Georgia" pitchFamily="34" charset="-122"/>
+                <a:cs typeface="Georgia" pitchFamily="34" charset="-120"/>
+              </a:rPr>
+              <a:t> Read Sūtra-sthāna ch. 11 in full (Sharma 1981 translation).</a:t>
+            </a:r>
+            <a:endParaRPr lang="en-US" sz="1200" dirty="0"/>
+          </a:p>
+          <a:p>
+            <a:pPr algn="l" marL="342900" indent="-342900">
+              <a:lnSpc>
+                <a:spcPts val="1620"/>
+              </a:lnSpc>
+              <a:spcAft>
+                <a:spcPts val="300"/>
+              </a:spcAft>
+              <a:buSzPct val="100000"/>
+              <a:buChar char="•"/>
+            </a:pPr>
+            <a:r>
+              <a:rPr lang="en-US" sz="1200" b="1" dirty="0">
+                <a:solidFill>
+                  <a:srgbClr val="1A1A1A"/>
+                </a:solidFill>
+                <a:latin typeface="Georgia" pitchFamily="34" charset="0"/>
+                <a:ea typeface="Georgia" pitchFamily="34" charset="-122"/>
+                <a:cs typeface="Georgia" pitchFamily="34" charset="-120"/>
+              </a:rPr>
+              <a:t>Tier down:</a:t>
+            </a:r>
+            <a:pPr algn="l" indent="0" marL="0">
+              <a:lnSpc>
+                <a:spcPts val="1620"/>
+              </a:lnSpc>
+              <a:spcAft>
+                <a:spcPts val="300"/>
+              </a:spcAft>
+              <a:buNone/>
+            </a:pPr>
+            <a:r>
+              <a:rPr lang="en-US" sz="1200" dirty="0">
+                <a:solidFill>
+                  <a:srgbClr val="1A1A1A"/>
+                </a:solidFill>
+                <a:latin typeface="Georgia" pitchFamily="34" charset="0"/>
+                <a:ea typeface="Georgia" pitchFamily="34" charset="-122"/>
+                <a:cs typeface="Georgia" pitchFamily="34" charset="-120"/>
+              </a:rPr>
+              <a:t> Focus on the </a:t>
+            </a:r>
+            <a:pPr algn="l" indent="0" marL="0">
+              <a:lnSpc>
+                <a:spcPts val="1620"/>
+              </a:lnSpc>
+              <a:spcAft>
+                <a:spcPts val="300"/>
+              </a:spcAft>
+              <a:buNone/>
+            </a:pPr>
+            <a:r>
+              <a:rPr lang="en-US" sz="1200" i="1" dirty="0">
+                <a:solidFill>
+                  <a:srgbClr val="1A1A1A"/>
+                </a:solidFill>
+                <a:latin typeface="Georgia" pitchFamily="34" charset="0"/>
+                <a:ea typeface="Georgia" pitchFamily="34" charset="-122"/>
+                <a:cs typeface="Georgia" pitchFamily="34" charset="-120"/>
+              </a:rPr>
               <a:t>āyu</a:t>
             </a:r>
             <a:pPr algn="l" indent="0" marL="0">
               <a:lnSpc>
+                <a:spcPts val="1620"/>
+              </a:lnSpc>
+              <a:spcAft>
+                <a:spcPts val="300"/>
+              </a:spcAft>
+              <a:buNone/>
+            </a:pPr>
+            <a:r>
+              <a:rPr lang="en-US" sz="1200" dirty="0">
+                <a:solidFill>
+                  <a:srgbClr val="1A1A1A"/>
+                </a:solidFill>
+                <a:latin typeface="Georgia" pitchFamily="34" charset="0"/>
+                <a:ea typeface="Georgia" pitchFamily="34" charset="-122"/>
+                <a:cs typeface="Georgia" pitchFamily="34" charset="-120"/>
+              </a:rPr>
+              <a:t> definition; the pramāṇa material is bonus.</a:t>
+            </a:r>
+            <a:endParaRPr lang="en-US" sz="1200" dirty="0"/>
+          </a:p>
+        </p:txBody>
+      </p:sp>
+      <p:sp>
+        <p:nvSpPr>
+          <p:cNvPr id="5" name="Text 3"/>
+          <p:cNvSpPr/>
+          <p:nvPr/>
+        </p:nvSpPr>
+        <p:spPr>
+          <a:xfrm>
+            <a:off x="406301" y="4434929"/>
+            <a:ext cx="8498026" cy="213271"/>
+          </a:xfrm>
+          <a:prstGeom prst="rect">
+            <a:avLst/>
+          </a:prstGeom>
+          <a:noFill/>
+          <a:ln/>
+        </p:spPr>
+        <p:txBody>
+          <a:bodyPr wrap="square" lIns="0" tIns="0" rIns="0" bIns="0" rtlCol="0" anchor="t"/>
+          <a:lstStyle/>
+          <a:p>
+            <a:pPr algn="l" indent="0" marL="0">
+              <a:lnSpc>
                 <a:spcPts val="1680"/>
               </a:lnSpc>
               <a:spcBef>
@@ -1915,15 +3407,503 @@
                 <a:ea typeface="Georgia" pitchFamily="34" charset="-122"/>
                 <a:cs typeface="Georgia" pitchFamily="34" charset="-120"/>
               </a:rPr>
-              <a:t> (life) and his epistemological framework.</a:t>
+              <a:t>Senior ·  · IKS Curriculum</a:t>
             </a:r>
             <a:endParaRPr lang="en-US" sz="1200" dirty="0"/>
           </a:p>
         </p:txBody>
       </p:sp>
-      <p:sp>
-        <p:nvSpPr>
-          <p:cNvPr id="7" name="Text 5"/>
+    </p:spTree>
+  </p:cSld>
+  <p:clrMapOvr>
+    <a:masterClrMapping/>
+  </p:clrMapOvr>
+</p:sld>
+</file>
+
+<file path=ppt/slides/slide14.xml><?xml version="1.0" encoding="utf-8"?>
+<p:sld xmlns:a="http://schemas.openxmlformats.org/drawingml/2006/main" xmlns:r="http://schemas.openxmlformats.org/officeDocument/2006/relationships" xmlns:p="http://schemas.openxmlformats.org/presentationml/2006/main">
+  <p:cSld name="Slide 14">
+    <p:bg>
+      <p:bgPr>
+        <a:solidFill>
+          <a:srgbClr val="FAF7F2"/>
+        </a:solidFill>
+      </p:bgPr>
+    </p:bg>
+    <p:spTree>
+      <p:nvGrpSpPr>
+        <p:cNvPr id="1" name=""/>
+        <p:cNvGrpSpPr/>
+        <p:nvPr/>
+      </p:nvGrpSpPr>
+      <p:grpSpPr>
+        <a:xfrm>
+          <a:off x="0" y="0"/>
+          <a:ext cx="0" cy="0"/>
+          <a:chOff x="0" y="0"/>
+          <a:chExt cx="0" cy="0"/>
+        </a:xfrm>
+      </p:grpSpPr>
+      <p:sp>
+        <p:nvSpPr>
+          <p:cNvPr id="2" name="Text 0"/>
+          <p:cNvSpPr/>
+          <p:nvPr/>
+        </p:nvSpPr>
+        <p:spPr>
+          <a:xfrm>
+            <a:off x="0" y="0"/>
+            <a:ext cx="9144000" cy="101501"/>
+          </a:xfrm>
+          <a:prstGeom prst="rect">
+            <a:avLst/>
+          </a:prstGeom>
+          <a:solidFill>
+            <a:srgbClr val="5D1D2E"/>
+          </a:solidFill>
+          <a:ln/>
+        </p:spPr>
+        <p:txBody>
+          <a:bodyPr wrap="square" rtlCol="0" anchor="ctr"/>
+          <a:lstStyle/>
+          <a:p>
+            <a:pPr indent="0" marL="0">
+              <a:buNone/>
+            </a:pPr>
+            <a:endParaRPr lang="en-US" dirty="0"/>
+          </a:p>
+        </p:txBody>
+      </p:sp>
+      <p:sp>
+        <p:nvSpPr>
+          <p:cNvPr id="3" name="Text 1"/>
+          <p:cNvSpPr/>
+          <p:nvPr/>
+        </p:nvSpPr>
+        <p:spPr>
+          <a:xfrm>
+            <a:off x="406301" y="457051"/>
+            <a:ext cx="8498026" cy="274290"/>
+          </a:xfrm>
+          <a:prstGeom prst="rect">
+            <a:avLst/>
+          </a:prstGeom>
+          <a:noFill/>
+          <a:ln/>
+        </p:spPr>
+        <p:txBody>
+          <a:bodyPr wrap="square" lIns="0" tIns="0" rIns="0" bIns="0" rtlCol="0" anchor="t"/>
+          <a:lstStyle/>
+          <a:p>
+            <a:pPr algn="l" indent="0" marL="0">
+              <a:lnSpc>
+                <a:spcPts val="2160"/>
+              </a:lnSpc>
+              <a:spcBef>
+                <a:spcPts val="600"/>
+              </a:spcBef>
+              <a:spcAft>
+                <a:spcPts val="800"/>
+              </a:spcAft>
+              <a:buNone/>
+            </a:pPr>
+            <a:r>
+              <a:rPr lang="en-US" sz="1800" b="1" dirty="0">
+                <a:solidFill>
+                  <a:srgbClr val="997929"/>
+                </a:solidFill>
+                <a:latin typeface="Times New Roman" pitchFamily="34" charset="0"/>
+                <a:ea typeface="Times New Roman" pitchFamily="34" charset="-122"/>
+                <a:cs typeface="Times New Roman" pitchFamily="34" charset="-120"/>
+              </a:rPr>
+              <a:t>Teacher notes</a:t>
+            </a:r>
+            <a:endParaRPr lang="en-US" sz="1800" dirty="0"/>
+          </a:p>
+        </p:txBody>
+      </p:sp>
+      <p:sp>
+        <p:nvSpPr>
+          <p:cNvPr id="4" name="Text 2"/>
+          <p:cNvSpPr/>
+          <p:nvPr/>
+        </p:nvSpPr>
+        <p:spPr>
+          <a:xfrm>
+            <a:off x="634901" y="883593"/>
+            <a:ext cx="8102798" cy="525661"/>
+          </a:xfrm>
+          <a:prstGeom prst="rect">
+            <a:avLst/>
+          </a:prstGeom>
+          <a:noFill/>
+          <a:ln/>
+        </p:spPr>
+        <p:txBody>
+          <a:bodyPr wrap="square" lIns="0" tIns="0" rIns="0" bIns="0" rtlCol="0" anchor="t"/>
+          <a:lstStyle/>
+          <a:p>
+            <a:pPr algn="l" marL="342900" indent="-342900">
+              <a:lnSpc>
+                <a:spcPts val="1620"/>
+              </a:lnSpc>
+              <a:spcAft>
+                <a:spcPts val="300"/>
+              </a:spcAft>
+              <a:buSzPct val="100000"/>
+              <a:buChar char="•"/>
+            </a:pPr>
+            <a:r>
+              <a:rPr lang="en-US" sz="1200" dirty="0">
+                <a:solidFill>
+                  <a:srgbClr val="1A1A1A"/>
+                </a:solidFill>
+                <a:latin typeface="Georgia" pitchFamily="34" charset="0"/>
+                <a:ea typeface="Georgia" pitchFamily="34" charset="-122"/>
+                <a:cs typeface="Georgia" pitchFamily="34" charset="-120"/>
+              </a:rPr>
+              <a:t>Caraka's text is dense. Don't try to cover everything. The </a:t>
+            </a:r>
+            <a:pPr algn="l" indent="0" marL="0">
+              <a:lnSpc>
+                <a:spcPts val="1620"/>
+              </a:lnSpc>
+              <a:spcAft>
+                <a:spcPts val="300"/>
+              </a:spcAft>
+              <a:buNone/>
+            </a:pPr>
+            <a:r>
+              <a:rPr lang="en-US" sz="1200" i="1" dirty="0">
+                <a:solidFill>
+                  <a:srgbClr val="1A1A1A"/>
+                </a:solidFill>
+                <a:latin typeface="Georgia" pitchFamily="34" charset="0"/>
+                <a:ea typeface="Georgia" pitchFamily="34" charset="-122"/>
+                <a:cs typeface="Georgia" pitchFamily="34" charset="-120"/>
+              </a:rPr>
+              <a:t>āyu</a:t>
+            </a:r>
+            <a:pPr algn="l" indent="0" marL="0">
+              <a:lnSpc>
+                <a:spcPts val="1620"/>
+              </a:lnSpc>
+              <a:spcAft>
+                <a:spcPts val="300"/>
+              </a:spcAft>
+              <a:buNone/>
+            </a:pPr>
+            <a:r>
+              <a:rPr lang="en-US" sz="1200" dirty="0">
+                <a:solidFill>
+                  <a:srgbClr val="1A1A1A"/>
+                </a:solidFill>
+                <a:latin typeface="Georgia" pitchFamily="34" charset="0"/>
+                <a:ea typeface="Georgia" pitchFamily="34" charset="-122"/>
+                <a:cs typeface="Georgia" pitchFamily="34" charset="-120"/>
+              </a:rPr>
+              <a:t> definition + the pramāṇa naming are enough.</a:t>
+            </a:r>
+            <a:endParaRPr lang="en-US" sz="1200" dirty="0"/>
+          </a:p>
+          <a:p>
+            <a:pPr algn="l" marL="342900" indent="-342900">
+              <a:lnSpc>
+                <a:spcPts val="1620"/>
+              </a:lnSpc>
+              <a:spcAft>
+                <a:spcPts val="300"/>
+              </a:spcAft>
+              <a:buSzPct val="100000"/>
+              <a:buChar char="•"/>
+            </a:pPr>
+            <a:r>
+              <a:rPr lang="en-US" sz="1200" dirty="0">
+                <a:solidFill>
+                  <a:srgbClr val="1A1A1A"/>
+                </a:solidFill>
+                <a:latin typeface="Georgia" pitchFamily="34" charset="0"/>
+                <a:ea typeface="Georgia" pitchFamily="34" charset="-122"/>
+                <a:cs typeface="Georgia" pitchFamily="34" charset="-120"/>
+              </a:rPr>
+              <a:t>The "mind + self" inclusion in life surprises students raised on a body-only definition. Honour the surprise.</a:t>
+            </a:r>
+            <a:endParaRPr lang="en-US" sz="1200" dirty="0"/>
+          </a:p>
+        </p:txBody>
+      </p:sp>
+      <p:sp>
+        <p:nvSpPr>
+          <p:cNvPr id="5" name="Text 3"/>
+          <p:cNvSpPr/>
+          <p:nvPr/>
+        </p:nvSpPr>
+        <p:spPr>
+          <a:xfrm>
+            <a:off x="406301" y="4434929"/>
+            <a:ext cx="8498026" cy="213271"/>
+          </a:xfrm>
+          <a:prstGeom prst="rect">
+            <a:avLst/>
+          </a:prstGeom>
+          <a:noFill/>
+          <a:ln/>
+        </p:spPr>
+        <p:txBody>
+          <a:bodyPr wrap="square" lIns="0" tIns="0" rIns="0" bIns="0" rtlCol="0" anchor="t"/>
+          <a:lstStyle/>
+          <a:p>
+            <a:pPr algn="l" indent="0" marL="0">
+              <a:lnSpc>
+                <a:spcPts val="1680"/>
+              </a:lnSpc>
+              <a:spcBef>
+                <a:spcPts val="300"/>
+              </a:spcBef>
+              <a:spcAft>
+                <a:spcPts val="300"/>
+              </a:spcAft>
+              <a:buNone/>
+            </a:pPr>
+            <a:r>
+              <a:rPr lang="en-US" sz="1200" dirty="0">
+                <a:solidFill>
+                  <a:srgbClr val="1A1A1A"/>
+                </a:solidFill>
+                <a:latin typeface="Georgia" pitchFamily="34" charset="0"/>
+                <a:ea typeface="Georgia" pitchFamily="34" charset="-122"/>
+                <a:cs typeface="Georgia" pitchFamily="34" charset="-120"/>
+              </a:rPr>
+              <a:t>Senior ·  · IKS Curriculum</a:t>
+            </a:r>
+            <a:endParaRPr lang="en-US" sz="1200" dirty="0"/>
+          </a:p>
+        </p:txBody>
+      </p:sp>
+    </p:spTree>
+  </p:cSld>
+  <p:clrMapOvr>
+    <a:masterClrMapping/>
+  </p:clrMapOvr>
+</p:sld>
+</file>
+
+<file path=ppt/slides/slide15.xml><?xml version="1.0" encoding="utf-8"?>
+<p:sld xmlns:a="http://schemas.openxmlformats.org/drawingml/2006/main" xmlns:r="http://schemas.openxmlformats.org/officeDocument/2006/relationships" xmlns:p="http://schemas.openxmlformats.org/presentationml/2006/main">
+  <p:cSld name="Slide 15">
+    <p:bg>
+      <p:bgPr>
+        <a:solidFill>
+          <a:srgbClr val="FAF7F2"/>
+        </a:solidFill>
+      </p:bgPr>
+    </p:bg>
+    <p:spTree>
+      <p:nvGrpSpPr>
+        <p:cNvPr id="1" name=""/>
+        <p:cNvGrpSpPr/>
+        <p:nvPr/>
+      </p:nvGrpSpPr>
+      <p:grpSpPr>
+        <a:xfrm>
+          <a:off x="0" y="0"/>
+          <a:ext cx="0" cy="0"/>
+          <a:chOff x="0" y="0"/>
+          <a:chExt cx="0" cy="0"/>
+        </a:xfrm>
+      </p:grpSpPr>
+      <p:sp>
+        <p:nvSpPr>
+          <p:cNvPr id="2" name="Text 0"/>
+          <p:cNvSpPr/>
+          <p:nvPr/>
+        </p:nvSpPr>
+        <p:spPr>
+          <a:xfrm>
+            <a:off x="0" y="0"/>
+            <a:ext cx="9144000" cy="101501"/>
+          </a:xfrm>
+          <a:prstGeom prst="rect">
+            <a:avLst/>
+          </a:prstGeom>
+          <a:solidFill>
+            <a:srgbClr val="5D1D2E"/>
+          </a:solidFill>
+          <a:ln/>
+        </p:spPr>
+        <p:txBody>
+          <a:bodyPr wrap="square" rtlCol="0" anchor="ctr"/>
+          <a:lstStyle/>
+          <a:p>
+            <a:pPr indent="0" marL="0">
+              <a:buNone/>
+            </a:pPr>
+            <a:endParaRPr lang="en-US" dirty="0"/>
+          </a:p>
+        </p:txBody>
+      </p:sp>
+      <p:sp>
+        <p:nvSpPr>
+          <p:cNvPr id="3" name="Text 1"/>
+          <p:cNvSpPr/>
+          <p:nvPr/>
+        </p:nvSpPr>
+        <p:spPr>
+          <a:xfrm>
+            <a:off x="406301" y="457051"/>
+            <a:ext cx="8498026" cy="274290"/>
+          </a:xfrm>
+          <a:prstGeom prst="rect">
+            <a:avLst/>
+          </a:prstGeom>
+          <a:noFill/>
+          <a:ln/>
+        </p:spPr>
+        <p:txBody>
+          <a:bodyPr wrap="square" lIns="0" tIns="0" rIns="0" bIns="0" rtlCol="0" anchor="t"/>
+          <a:lstStyle/>
+          <a:p>
+            <a:pPr algn="l" indent="0" marL="0">
+              <a:lnSpc>
+                <a:spcPts val="2160"/>
+              </a:lnSpc>
+              <a:spcBef>
+                <a:spcPts val="600"/>
+              </a:spcBef>
+              <a:spcAft>
+                <a:spcPts val="800"/>
+              </a:spcAft>
+              <a:buNone/>
+            </a:pPr>
+            <a:r>
+              <a:rPr lang="en-US" sz="1800" b="1" dirty="0">
+                <a:solidFill>
+                  <a:srgbClr val="997929"/>
+                </a:solidFill>
+                <a:latin typeface="Times New Roman" pitchFamily="34" charset="0"/>
+                <a:ea typeface="Times New Roman" pitchFamily="34" charset="-122"/>
+                <a:cs typeface="Times New Roman" pitchFamily="34" charset="-120"/>
+              </a:rPr>
+              <a:t>Citation(s) used</a:t>
+            </a:r>
+            <a:endParaRPr lang="en-US" sz="1800" dirty="0"/>
+          </a:p>
+        </p:txBody>
+      </p:sp>
+      <p:sp>
+        <p:nvSpPr>
+          <p:cNvPr id="4" name="Text 2"/>
+          <p:cNvSpPr/>
+          <p:nvPr/>
+        </p:nvSpPr>
+        <p:spPr>
+          <a:xfrm>
+            <a:off x="634901" y="883593"/>
+            <a:ext cx="8102798" cy="544711"/>
+          </a:xfrm>
+          <a:prstGeom prst="rect">
+            <a:avLst/>
+          </a:prstGeom>
+          <a:noFill/>
+          <a:ln/>
+        </p:spPr>
+        <p:txBody>
+          <a:bodyPr wrap="square" lIns="0" tIns="0" rIns="0" bIns="0" rtlCol="0" anchor="t"/>
+          <a:lstStyle/>
+          <a:p>
+            <a:pPr algn="l" marL="342900" indent="-342900">
+              <a:lnSpc>
+                <a:spcPts val="1620"/>
+              </a:lnSpc>
+              <a:spcAft>
+                <a:spcPts val="300"/>
+              </a:spcAft>
+              <a:buSzPct val="100000"/>
+              <a:buChar char="•"/>
+            </a:pPr>
+            <a:r>
+              <a:rPr lang="en-US" sz="1200" dirty="0">
+                <a:solidFill>
+                  <a:srgbClr val="1A1A1A"/>
+                </a:solidFill>
+                <a:latin typeface="Georgia" pitchFamily="34" charset="0"/>
+                <a:ea typeface="Georgia" pitchFamily="34" charset="-122"/>
+                <a:cs typeface="Georgia" pitchFamily="34" charset="-120"/>
+              </a:rPr>
+              <a:t>Caraka Sūtra-sthāna 1.42 — Sharma (1981).</a:t>
+            </a:r>
+            <a:endParaRPr lang="en-US" sz="1200" dirty="0"/>
+          </a:p>
+          <a:p>
+            <a:pPr algn="l" marL="342900" indent="-342900">
+              <a:lnSpc>
+                <a:spcPts val="1620"/>
+              </a:lnSpc>
+              <a:spcAft>
+                <a:spcPts val="300"/>
+              </a:spcAft>
+              <a:buSzPct val="100000"/>
+              <a:buChar char="•"/>
+            </a:pPr>
+            <a:r>
+              <a:rPr lang="en-US" sz="1200" dirty="0">
+                <a:solidFill>
+                  <a:srgbClr val="1A1A1A"/>
+                </a:solidFill>
+                <a:latin typeface="Georgia" pitchFamily="34" charset="0"/>
+                <a:ea typeface="Georgia" pitchFamily="34" charset="-122"/>
+                <a:cs typeface="Georgia" pitchFamily="34" charset="-120"/>
+              </a:rPr>
+              <a:t>vidya-karana RAG </a:t>
+            </a:r>
+            <a:pPr algn="l" indent="0" marL="0">
+              <a:lnSpc>
+                <a:spcPts val="1620"/>
+              </a:lnSpc>
+              <a:spcAft>
+                <a:spcPts val="300"/>
+              </a:spcAft>
+              <a:buNone/>
+            </a:pPr>
+            <a:r>
+              <a:rPr lang="en-US" sz="1200" dirty="0">
+                <a:solidFill>
+                  <a:srgbClr val="1A1A1A"/>
+                </a:solidFill>
+                <a:latin typeface="Georgia" pitchFamily="34" charset="0"/>
+                <a:ea typeface="Georgia" pitchFamily="34" charset="-122"/>
+                <a:cs typeface="Georgia" pitchFamily="34" charset="-120"/>
+              </a:rPr>
+              <a:t>day-01-intro.json</a:t>
+            </a:r>
+            <a:pPr algn="l" indent="0" marL="0">
+              <a:lnSpc>
+                <a:spcPts val="1620"/>
+              </a:lnSpc>
+              <a:spcAft>
+                <a:spcPts val="300"/>
+              </a:spcAft>
+              <a:buNone/>
+            </a:pPr>
+            <a:r>
+              <a:rPr lang="en-US" sz="1200" dirty="0">
+                <a:solidFill>
+                  <a:srgbClr val="1A1A1A"/>
+                </a:solidFill>
+                <a:latin typeface="Georgia" pitchFamily="34" charset="0"/>
+                <a:ea typeface="Georgia" pitchFamily="34" charset="-122"/>
+                <a:cs typeface="Georgia" pitchFamily="34" charset="-120"/>
+              </a:rPr>
+              <a:t> for supporting Bhagavad-gītā references.</a:t>
+            </a:r>
+            <a:endParaRPr lang="en-US" sz="1200" dirty="0"/>
+          </a:p>
+        </p:txBody>
+      </p:sp>
+      <p:sp>
+        <p:nvSpPr>
+          <p:cNvPr id="5" name="Text 3"/>
           <p:cNvSpPr/>
           <p:nvPr/>
         </p:nvSpPr>
@@ -2073,7 +4053,7 @@
                 <a:ea typeface="Times New Roman" pitchFamily="34" charset="-122"/>
                 <a:cs typeface="Times New Roman" pitchFamily="34" charset="-120"/>
               </a:rPr>
-              <a:t>Materials</a:t>
+              <a:t>Learning objective</a:t>
             </a:r>
             <a:endParaRPr lang="en-US" sz="1800" dirty="0"/>
           </a:p>
@@ -2121,7 +4101,53 @@
                 <a:ea typeface="Georgia" pitchFamily="34" charset="-122"/>
                 <a:cs typeface="Georgia" pitchFamily="34" charset="-120"/>
               </a:rPr>
-              <a:t>– Printed handout: Caraka Sūtra-sthāna 1.41–45 (definition of āyu) in IAST + translation – Optional: Caraka Sūtra-sthāna 11 (pramāṇa — means of valid knowledge)</a:t>
+              <a:t>Students read selected verses from Caraka Saṃhitā Sūtra-sthāna in IAST + translation, identifying Caraka's definition of </a:t>
+            </a:r>
+            <a:pPr algn="l" indent="0" marL="0">
+              <a:lnSpc>
+                <a:spcPts val="1680"/>
+              </a:lnSpc>
+              <a:spcBef>
+                <a:spcPts val="300"/>
+              </a:spcBef>
+              <a:spcAft>
+                <a:spcPts val="300"/>
+              </a:spcAft>
+              <a:buNone/>
+            </a:pPr>
+            <a:r>
+              <a:rPr lang="en-US" sz="1200" i="1" dirty="0">
+                <a:solidFill>
+                  <a:srgbClr val="1A1A1A"/>
+                </a:solidFill>
+                <a:latin typeface="Georgia" pitchFamily="34" charset="0"/>
+                <a:ea typeface="Georgia" pitchFamily="34" charset="-122"/>
+                <a:cs typeface="Georgia" pitchFamily="34" charset="-120"/>
+              </a:rPr>
+              <a:t>āyu</a:t>
+            </a:r>
+            <a:pPr algn="l" indent="0" marL="0">
+              <a:lnSpc>
+                <a:spcPts val="1680"/>
+              </a:lnSpc>
+              <a:spcBef>
+                <a:spcPts val="300"/>
+              </a:spcBef>
+              <a:spcAft>
+                <a:spcPts val="300"/>
+              </a:spcAft>
+              <a:buNone/>
+            </a:pPr>
+            <a:r>
+              <a:rPr lang="en-US" sz="1200" dirty="0">
+                <a:solidFill>
+                  <a:srgbClr val="1A1A1A"/>
+                </a:solidFill>
+                <a:latin typeface="Georgia" pitchFamily="34" charset="0"/>
+                <a:ea typeface="Georgia" pitchFamily="34" charset="-122"/>
+                <a:cs typeface="Georgia" pitchFamily="34" charset="-120"/>
+              </a:rPr>
+              <a:t> (life) and his epistemological framework.</a:t>
             </a:r>
             <a:endParaRPr lang="en-US" sz="1200" dirty="0"/>
           </a:p>
@@ -2279,7 +4305,7 @@
                 <a:ea typeface="Times New Roman" pitchFamily="34" charset="-122"/>
                 <a:cs typeface="Times New Roman" pitchFamily="34" charset="-120"/>
               </a:rPr>
-              <a:t>Flow</a:t>
+              <a:t>Materials</a:t>
             </a:r>
             <a:endParaRPr lang="en-US" sz="1800" dirty="0"/>
           </a:p>
@@ -2288,6 +4314,76 @@
       <p:sp>
         <p:nvSpPr>
           <p:cNvPr id="4" name="Text 2"/>
+          <p:cNvSpPr/>
+          <p:nvPr/>
+        </p:nvSpPr>
+        <p:spPr>
+          <a:xfrm>
+            <a:off x="634901" y="883593"/>
+            <a:ext cx="8102798" cy="525661"/>
+          </a:xfrm>
+          <a:prstGeom prst="rect">
+            <a:avLst/>
+          </a:prstGeom>
+          <a:noFill/>
+          <a:ln/>
+        </p:spPr>
+        <p:txBody>
+          <a:bodyPr wrap="square" lIns="0" tIns="0" rIns="0" bIns="0" rtlCol="0" anchor="t"/>
+          <a:lstStyle/>
+          <a:p>
+            <a:pPr algn="l" marL="342900" indent="-342900">
+              <a:lnSpc>
+                <a:spcPts val="1620"/>
+              </a:lnSpc>
+              <a:spcAft>
+                <a:spcPts val="300"/>
+              </a:spcAft>
+              <a:buSzPct val="100000"/>
+              <a:buChar char="•"/>
+            </a:pPr>
+            <a:r>
+              <a:rPr lang="en-US" sz="1200" dirty="0">
+                <a:solidFill>
+                  <a:srgbClr val="1A1A1A"/>
+                </a:solidFill>
+                <a:latin typeface="Georgia" pitchFamily="34" charset="0"/>
+                <a:ea typeface="Georgia" pitchFamily="34" charset="-122"/>
+                <a:cs typeface="Georgia" pitchFamily="34" charset="-120"/>
+              </a:rPr>
+              <a:t>Printed handout: Caraka Sūtra-sthāna 1.41–45 (definition of āyu) in IAST + translation</a:t>
+            </a:r>
+            <a:endParaRPr lang="en-US" sz="1200" dirty="0"/>
+          </a:p>
+          <a:p>
+            <a:pPr algn="l" marL="342900" indent="-342900">
+              <a:lnSpc>
+                <a:spcPts val="1620"/>
+              </a:lnSpc>
+              <a:spcAft>
+                <a:spcPts val="300"/>
+              </a:spcAft>
+              <a:buSzPct val="100000"/>
+              <a:buChar char="•"/>
+            </a:pPr>
+            <a:r>
+              <a:rPr lang="en-US" sz="1200" dirty="0">
+                <a:solidFill>
+                  <a:srgbClr val="1A1A1A"/>
+                </a:solidFill>
+                <a:latin typeface="Georgia" pitchFamily="34" charset="0"/>
+                <a:ea typeface="Georgia" pitchFamily="34" charset="-122"/>
+                <a:cs typeface="Georgia" pitchFamily="34" charset="-120"/>
+              </a:rPr>
+              <a:t>Optional: Caraka Sūtra-sthāna 11 (pramāṇa — means of valid knowledge)</a:t>
+            </a:r>
+            <a:endParaRPr lang="en-US" sz="1200" dirty="0"/>
+          </a:p>
+        </p:txBody>
+      </p:sp>
+      <p:sp>
+        <p:nvSpPr>
+          <p:cNvPr id="5" name="Text 3"/>
           <p:cNvSpPr/>
           <p:nvPr/>
         </p:nvSpPr>
@@ -2437,7 +4533,7 @@
                 <a:ea typeface="Times New Roman" pitchFamily="34" charset="-122"/>
                 <a:cs typeface="Times New Roman" pitchFamily="34" charset="-120"/>
               </a:rPr>
-              <a:t>Warm-up (5 min)</a:t>
+              <a:t>Flow</a:t>
             </a:r>
             <a:endParaRPr lang="en-US" sz="1800" dirty="0"/>
           </a:p>
@@ -2446,54 +4542,6 @@
       <p:sp>
         <p:nvSpPr>
           <p:cNvPr id="4" name="Text 2"/>
-          <p:cNvSpPr/>
-          <p:nvPr/>
-        </p:nvSpPr>
-        <p:spPr>
-          <a:xfrm>
-            <a:off x="406301" y="870942"/>
-            <a:ext cx="8498026" cy="213271"/>
-          </a:xfrm>
-          <a:prstGeom prst="rect">
-            <a:avLst/>
-          </a:prstGeom>
-          <a:noFill/>
-          <a:ln/>
-        </p:spPr>
-        <p:txBody>
-          <a:bodyPr wrap="square" lIns="0" tIns="0" rIns="0" bIns="0" rtlCol="0" anchor="t"/>
-          <a:lstStyle/>
-          <a:p>
-            <a:pPr algn="l" indent="0" marL="0">
-              <a:lnSpc>
-                <a:spcPts val="1680"/>
-              </a:lnSpc>
-              <a:spcBef>
-                <a:spcPts val="300"/>
-              </a:spcBef>
-              <a:spcAft>
-                <a:spcPts val="300"/>
-              </a:spcAft>
-              <a:buNone/>
-            </a:pPr>
-            <a:r>
-              <a:rPr lang="en-US" sz="1200" dirty="0">
-                <a:solidFill>
-                  <a:srgbClr val="1A1A1A"/>
-                </a:solidFill>
-                <a:latin typeface="Georgia" pitchFamily="34" charset="0"/>
-                <a:ea typeface="Georgia" pitchFamily="34" charset="-122"/>
-                <a:cs typeface="Georgia" pitchFamily="34" charset="-120"/>
-              </a:rPr>
-              <a:t>Recall: 3 foundational texts; 4 of the 8 branches.</a:t>
-            </a:r>
-            <a:endParaRPr lang="en-US" sz="1200" dirty="0"/>
-          </a:p>
-        </p:txBody>
-      </p:sp>
-      <p:sp>
-        <p:nvSpPr>
-          <p:cNvPr id="5" name="Text 3"/>
           <p:cNvSpPr/>
           <p:nvPr/>
         </p:nvSpPr>
@@ -2643,7 +4691,7 @@
                 <a:ea typeface="Times New Roman" pitchFamily="34" charset="-122"/>
                 <a:cs typeface="Times New Roman" pitchFamily="34" charset="-120"/>
               </a:rPr>
-              <a:t>Activity (10 min)</a:t>
+              <a:t>Warm-up (5 min)</a:t>
             </a:r>
             <a:endParaRPr lang="en-US" sz="1800" dirty="0"/>
           </a:p>
@@ -2691,7 +4739,7 @@
                 <a:ea typeface="Georgia" pitchFamily="34" charset="-122"/>
                 <a:cs typeface="Georgia" pitchFamily="34" charset="-120"/>
               </a:rPr>
-              <a:t>Quiet reading. Students annotate the verse handout. Note one question.</a:t>
+              <a:t>Recall: 3 foundational texts; 4 of the 8 branches.</a:t>
             </a:r>
             <a:endParaRPr lang="en-US" sz="1200" dirty="0"/>
           </a:p>
@@ -2849,7 +4897,7 @@
                 <a:ea typeface="Times New Roman" pitchFamily="34" charset="-122"/>
                 <a:cs typeface="Times New Roman" pitchFamily="34" charset="-120"/>
               </a:rPr>
-              <a:t>Wrap-up (5 min)</a:t>
+              <a:t>Reading (25 min)</a:t>
             </a:r>
             <a:endParaRPr lang="en-US" sz="1800" dirty="0"/>
           </a:p>
@@ -2863,8 +4911,8 @@
         </p:nvSpPr>
         <p:spPr>
           <a:xfrm>
-            <a:off x="406301" y="870942"/>
-            <a:ext cx="8498026" cy="213271"/>
+            <a:off x="634901" y="883593"/>
+            <a:ext cx="8102798" cy="281880"/>
           </a:xfrm>
           <a:prstGeom prst="rect">
             <a:avLst/>
@@ -2876,6 +4924,228 @@
           <a:bodyPr wrap="square" lIns="0" tIns="0" rIns="0" bIns="0" rtlCol="0" anchor="t"/>
           <a:lstStyle/>
           <a:p>
+            <a:pPr algn="l" marL="342900" indent="-342900">
+              <a:lnSpc>
+                <a:spcPts val="1620"/>
+              </a:lnSpc>
+              <a:spcAft>
+                <a:spcPts val="300"/>
+              </a:spcAft>
+              <a:buSzPct val="100000"/>
+              <a:buChar char="•"/>
+            </a:pPr>
+            <a:pPr algn="l" indent="0" marL="0">
+              <a:lnSpc>
+                <a:spcPts val="1620"/>
+              </a:lnSpc>
+              <a:spcAft>
+                <a:spcPts val="300"/>
+              </a:spcAft>
+              <a:buNone/>
+            </a:pPr>
+            <a:r>
+              <a:rPr lang="en-US" sz="1200" i="1" dirty="0">
+                <a:solidFill>
+                  <a:srgbClr val="1A1A1A"/>
+                </a:solidFill>
+                <a:latin typeface="Georgia" pitchFamily="34" charset="0"/>
+                <a:ea typeface="Georgia" pitchFamily="34" charset="-122"/>
+                <a:cs typeface="Georgia" pitchFamily="34" charset="-120"/>
+              </a:rPr>
+              <a:t>Caraka's definition of</a:t>
+            </a:r>
+            <a:pPr algn="l" indent="0" marL="0">
+              <a:lnSpc>
+                <a:spcPts val="1620"/>
+              </a:lnSpc>
+              <a:spcAft>
+                <a:spcPts val="300"/>
+              </a:spcAft>
+              <a:buNone/>
+            </a:pPr>
+            <a:r>
+              <a:rPr lang="en-US" sz="1200" dirty="0">
+                <a:solidFill>
+                  <a:srgbClr val="1A1A1A"/>
+                </a:solidFill>
+                <a:latin typeface="Georgia" pitchFamily="34" charset="0"/>
+                <a:ea typeface="Georgia" pitchFamily="34" charset="-122"/>
+                <a:cs typeface="Georgia" pitchFamily="34" charset="-120"/>
+              </a:rPr>
+              <a:t>āyu*** (Sūtra-sthāna 1.42):</a:t>
+            </a:r>
+            <a:endParaRPr lang="en-US" sz="1200" dirty="0"/>
+          </a:p>
+        </p:txBody>
+      </p:sp>
+      <p:sp>
+        <p:nvSpPr>
+          <p:cNvPr id="5" name="Text 3"/>
+          <p:cNvSpPr/>
+          <p:nvPr/>
+        </p:nvSpPr>
+        <p:spPr>
+          <a:xfrm>
+            <a:off x="406301" y="1266974"/>
+            <a:ext cx="8331398" cy="611981"/>
+          </a:xfrm>
+          <a:prstGeom prst="rect">
+            <a:avLst/>
+          </a:prstGeom>
+          <a:solidFill>
+            <a:srgbClr val="FFFFFF"/>
+          </a:solidFill>
+          <a:ln/>
+        </p:spPr>
+        <p:txBody>
+          <a:bodyPr wrap="square" rtlCol="0" anchor="ctr"/>
+          <a:lstStyle/>
+          <a:p>
+            <a:pPr indent="0" marL="0">
+              <a:buNone/>
+            </a:pPr>
+            <a:endParaRPr lang="en-US" dirty="0"/>
+          </a:p>
+        </p:txBody>
+      </p:sp>
+      <p:sp>
+        <p:nvSpPr>
+          <p:cNvPr id="6" name="Shape 4"/>
+          <p:cNvSpPr/>
+          <p:nvPr/>
+        </p:nvSpPr>
+        <p:spPr>
+          <a:xfrm>
+            <a:off x="434876" y="1266974"/>
+            <a:ext cx="0" cy="611981"/>
+          </a:xfrm>
+          <a:prstGeom prst="line">
+            <a:avLst/>
+          </a:prstGeom>
+          <a:noFill/>
+          <a:ln w="57150">
+            <a:solidFill>
+              <a:srgbClr val="997929"/>
+            </a:solidFill>
+            <a:prstDash val="solid"/>
+          </a:ln>
+        </p:spPr>
+      </p:sp>
+      <p:sp>
+        <p:nvSpPr>
+          <p:cNvPr id="7" name="Text 5"/>
+          <p:cNvSpPr/>
+          <p:nvPr/>
+        </p:nvSpPr>
+        <p:spPr>
+          <a:xfrm>
+            <a:off x="692051" y="1457474"/>
+            <a:ext cx="7973389" cy="230981"/>
+          </a:xfrm>
+          <a:prstGeom prst="rect">
+            <a:avLst/>
+          </a:prstGeom>
+          <a:noFill/>
+          <a:ln/>
+        </p:spPr>
+        <p:txBody>
+          <a:bodyPr wrap="square" lIns="0" tIns="0" rIns="0" bIns="0" rtlCol="0" anchor="t"/>
+          <a:lstStyle/>
+          <a:p>
+            <a:pPr algn="l" indent="0" marL="0">
+              <a:lnSpc>
+                <a:spcPts val="1820"/>
+              </a:lnSpc>
+              <a:spcBef>
+                <a:spcPts val="300"/>
+              </a:spcBef>
+              <a:spcAft>
+                <a:spcPts val="300"/>
+              </a:spcAft>
+              <a:buNone/>
+            </a:pPr>
+            <a:r>
+              <a:rPr lang="en-US" sz="1300" i="1" dirty="0">
+                <a:solidFill>
+                  <a:srgbClr val="1A1A1A"/>
+                </a:solidFill>
+                <a:latin typeface="Times New Roman" pitchFamily="34" charset="0"/>
+                <a:ea typeface="Times New Roman" pitchFamily="34" charset="-122"/>
+                <a:cs typeface="Times New Roman" pitchFamily="34" charset="-120"/>
+              </a:rPr>
+              <a:t>śarīrendṛyasattvātmasaṁyogo dhāri jīvitam</a:t>
+            </a:r>
+            <a:pPr algn="l" indent="0" marL="0">
+              <a:lnSpc>
+                <a:spcPts val="1820"/>
+              </a:lnSpc>
+              <a:spcBef>
+                <a:spcPts val="300"/>
+              </a:spcBef>
+              <a:spcAft>
+                <a:spcPts val="300"/>
+              </a:spcAft>
+              <a:buNone/>
+            </a:pPr>
+            <a:r>
+              <a:rPr lang="en-US" sz="1300" dirty="0">
+                <a:solidFill>
+                  <a:srgbClr val="1A1A1A"/>
+                </a:solidFill>
+                <a:latin typeface="Times New Roman" pitchFamily="34" charset="0"/>
+                <a:ea typeface="Times New Roman" pitchFamily="34" charset="-122"/>
+                <a:cs typeface="Times New Roman" pitchFamily="34" charset="-120"/>
+              </a:rPr>
+              <a:t> </a:t>
+            </a:r>
+            <a:pPr algn="l" indent="0" marL="0">
+              <a:lnSpc>
+                <a:spcPts val="1820"/>
+              </a:lnSpc>
+              <a:spcBef>
+                <a:spcPts val="300"/>
+              </a:spcBef>
+              <a:spcAft>
+                <a:spcPts val="300"/>
+              </a:spcAft>
+              <a:buNone/>
+            </a:pPr>
+            <a:r>
+              <a:rPr lang="en-US" sz="1300" i="1" dirty="0">
+                <a:solidFill>
+                  <a:srgbClr val="1A1A1A"/>
+                </a:solidFill>
+                <a:latin typeface="Times New Roman" pitchFamily="34" charset="0"/>
+                <a:ea typeface="Times New Roman" pitchFamily="34" charset="-122"/>
+                <a:cs typeface="Times New Roman" pitchFamily="34" charset="-120"/>
+              </a:rPr>
+              <a:t>nityagaścānubandhaśca paryāyair āyur ucyate</a:t>
+            </a:r>
+            <a:endParaRPr lang="en-US" sz="1300" dirty="0"/>
+          </a:p>
+        </p:txBody>
+      </p:sp>
+      <p:sp>
+        <p:nvSpPr>
+          <p:cNvPr id="8" name="Text 6"/>
+          <p:cNvSpPr/>
+          <p:nvPr/>
+        </p:nvSpPr>
+        <p:spPr>
+          <a:xfrm>
+            <a:off x="406301" y="1967805"/>
+            <a:ext cx="8498026" cy="426541"/>
+          </a:xfrm>
+          <a:prstGeom prst="rect">
+            <a:avLst/>
+          </a:prstGeom>
+          <a:noFill/>
+          <a:ln/>
+        </p:spPr>
+        <p:txBody>
+          <a:bodyPr wrap="square" lIns="0" tIns="0" rIns="0" bIns="0" rtlCol="0" anchor="t"/>
+          <a:lstStyle/>
+          <a:p>
             <a:pPr algn="l" indent="0" marL="0">
               <a:lnSpc>
                 <a:spcPts val="1680"/>
@@ -2897,7 +5167,7 @@
                 <a:ea typeface="Georgia" pitchFamily="34" charset="-122"/>
                 <a:cs typeface="Georgia" pitchFamily="34" charset="-120"/>
               </a:rPr>
-              <a:t>– Preview Day 3: </a:t>
+              <a:t>"The conjunction of body, senses, mind, and self — which sustains [life] — is called </a:t>
             </a:r>
             <a:pPr algn="l" indent="0" marL="0">
               <a:lnSpc>
@@ -2920,7 +5190,76 @@
                 <a:ea typeface="Georgia" pitchFamily="34" charset="-122"/>
                 <a:cs typeface="Georgia" pitchFamily="34" charset="-120"/>
               </a:rPr>
-              <a:t>"Tomorrow — Tridosha theory in classical depth + modern engagement."</a:t>
+              <a:t>jīvita</a:t>
+            </a:r>
+            <a:pPr algn="l" indent="0" marL="0">
+              <a:lnSpc>
+                <a:spcPts val="1680"/>
+              </a:lnSpc>
+              <a:spcBef>
+                <a:spcPts val="300"/>
+              </a:spcBef>
+              <a:spcAft>
+                <a:spcPts val="300"/>
+              </a:spcAft>
+              <a:buNone/>
+            </a:pPr>
+            <a:r>
+              <a:rPr lang="en-US" sz="1200" dirty="0">
+                <a:solidFill>
+                  <a:srgbClr val="1A1A1A"/>
+                </a:solidFill>
+                <a:latin typeface="Georgia" pitchFamily="34" charset="0"/>
+                <a:ea typeface="Georgia" pitchFamily="34" charset="-122"/>
+                <a:cs typeface="Georgia" pitchFamily="34" charset="-120"/>
+              </a:rPr>
+              <a:t> (life). Persistent and connected — these are synonyms for </a:t>
+            </a:r>
+            <a:pPr algn="l" indent="0" marL="0">
+              <a:lnSpc>
+                <a:spcPts val="1680"/>
+              </a:lnSpc>
+              <a:spcBef>
+                <a:spcPts val="300"/>
+              </a:spcBef>
+              <a:spcAft>
+                <a:spcPts val="300"/>
+              </a:spcAft>
+              <a:buNone/>
+            </a:pPr>
+            <a:r>
+              <a:rPr lang="en-US" sz="1200" i="1" dirty="0">
+                <a:solidFill>
+                  <a:srgbClr val="1A1A1A"/>
+                </a:solidFill>
+                <a:latin typeface="Georgia" pitchFamily="34" charset="0"/>
+                <a:ea typeface="Georgia" pitchFamily="34" charset="-122"/>
+                <a:cs typeface="Georgia" pitchFamily="34" charset="-120"/>
+              </a:rPr>
+              <a:t>āyu</a:t>
+            </a:r>
+            <a:pPr algn="l" indent="0" marL="0">
+              <a:lnSpc>
+                <a:spcPts val="1680"/>
+              </a:lnSpc>
+              <a:spcBef>
+                <a:spcPts val="300"/>
+              </a:spcBef>
+              <a:spcAft>
+                <a:spcPts val="300"/>
+              </a:spcAft>
+              <a:buNone/>
+            </a:pPr>
+            <a:r>
+              <a:rPr lang="en-US" sz="1200" dirty="0">
+                <a:solidFill>
+                  <a:srgbClr val="1A1A1A"/>
+                </a:solidFill>
+                <a:latin typeface="Georgia" pitchFamily="34" charset="0"/>
+                <a:ea typeface="Georgia" pitchFamily="34" charset="-122"/>
+                <a:cs typeface="Georgia" pitchFamily="34" charset="-120"/>
+              </a:rPr>
+              <a:t>."</a:t>
             </a:r>
             <a:endParaRPr lang="en-US" sz="1200" dirty="0"/>
           </a:p>
@@ -2928,7 +5267,7 @@
       </p:sp>
       <p:sp>
         <p:nvSpPr>
-          <p:cNvPr id="5" name="Text 3"/>
+          <p:cNvPr id="9" name="Text 7"/>
           <p:cNvSpPr/>
           <p:nvPr/>
         </p:nvSpPr>
@@ -3078,7 +5417,7 @@
                 <a:ea typeface="Times New Roman" pitchFamily="34" charset="-122"/>
                 <a:cs typeface="Times New Roman" pitchFamily="34" charset="-120"/>
               </a:rPr>
-              <a:t>Differentiation</a:t>
+              <a:t>Reading (25 min) (cont.)</a:t>
             </a:r>
             <a:endParaRPr lang="en-US" sz="1800" dirty="0"/>
           </a:p>
@@ -3092,8 +5431,8 @@
         </p:nvSpPr>
         <p:spPr>
           <a:xfrm>
-            <a:off x="634901" y="883593"/>
-            <a:ext cx="8102798" cy="525661"/>
+            <a:off x="406301" y="870942"/>
+            <a:ext cx="8498026" cy="213271"/>
           </a:xfrm>
           <a:prstGeom prst="rect">
             <a:avLst/>
@@ -3105,6 +5444,54 @@
           <a:bodyPr wrap="square" lIns="0" tIns="0" rIns="0" bIns="0" rtlCol="0" anchor="t"/>
           <a:lstStyle/>
           <a:p>
+            <a:pPr algn="l" indent="0" marL="0">
+              <a:lnSpc>
+                <a:spcPts val="1680"/>
+              </a:lnSpc>
+              <a:spcBef>
+                <a:spcPts val="300"/>
+              </a:spcBef>
+              <a:spcAft>
+                <a:spcPts val="300"/>
+              </a:spcAft>
+              <a:buNone/>
+            </a:pPr>
+            <a:r>
+              <a:rPr lang="en-US" sz="1200" b="1" dirty="0">
+                <a:solidFill>
+                  <a:srgbClr val="1A1A1A"/>
+                </a:solidFill>
+                <a:latin typeface="Georgia" pitchFamily="34" charset="0"/>
+                <a:ea typeface="Georgia" pitchFamily="34" charset="-122"/>
+                <a:cs typeface="Georgia" pitchFamily="34" charset="-120"/>
+              </a:rPr>
+              <a:t>Word-by-word:</a:t>
+            </a:r>
+            <a:endParaRPr lang="en-US" sz="1200" dirty="0"/>
+          </a:p>
+        </p:txBody>
+      </p:sp>
+      <p:sp>
+        <p:nvSpPr>
+          <p:cNvPr id="5" name="Text 3"/>
+          <p:cNvSpPr/>
+          <p:nvPr/>
+        </p:nvSpPr>
+        <p:spPr>
+          <a:xfrm>
+            <a:off x="634901" y="1173063"/>
+            <a:ext cx="8102798" cy="1744563"/>
+          </a:xfrm>
+          <a:prstGeom prst="rect">
+            <a:avLst/>
+          </a:prstGeom>
+          <a:noFill/>
+          <a:ln/>
+        </p:spPr>
+        <p:txBody>
+          <a:bodyPr wrap="square" lIns="0" tIns="0" rIns="0" bIns="0" rtlCol="0" anchor="t"/>
+          <a:lstStyle/>
+          <a:p>
             <a:pPr algn="l" marL="342900" indent="-342900">
               <a:lnSpc>
                 <a:spcPts val="1620"/>
@@ -3116,15 +5503,15 @@
               <a:buChar char="•"/>
             </a:pPr>
             <a:r>
-              <a:rPr lang="en-US" sz="1200" b="1" dirty="0">
-                <a:solidFill>
-                  <a:srgbClr val="1A1A1A"/>
-                </a:solidFill>
-                <a:latin typeface="Georgia" pitchFamily="34" charset="0"/>
-                <a:ea typeface="Georgia" pitchFamily="34" charset="-122"/>
-                <a:cs typeface="Georgia" pitchFamily="34" charset="-120"/>
-              </a:rPr>
-              <a:t>Tier up:</a:t>
+              <a:rPr lang="en-US" sz="1200" i="1" dirty="0">
+                <a:solidFill>
+                  <a:srgbClr val="1A1A1A"/>
+                </a:solidFill>
+                <a:latin typeface="Georgia" pitchFamily="34" charset="0"/>
+                <a:ea typeface="Georgia" pitchFamily="34" charset="-122"/>
+                <a:cs typeface="Georgia" pitchFamily="34" charset="-120"/>
+              </a:rPr>
+              <a:t>śarīra</a:t>
             </a:r>
             <a:pPr algn="l" indent="0" marL="0">
               <a:lnSpc>
@@ -3144,7 +5531,7 @@
                 <a:ea typeface="Georgia" pitchFamily="34" charset="-122"/>
                 <a:cs typeface="Georgia" pitchFamily="34" charset="-120"/>
               </a:rPr>
-              <a:t> Read Sūtra-sthāna ch. 11 in full (Sharma 1981 translation).</a:t>
+              <a:t> = body</a:t>
             </a:r>
             <a:endParaRPr lang="en-US" sz="1200" dirty="0"/>
           </a:p>
@@ -3160,15 +5547,15 @@
               <a:buChar char="•"/>
             </a:pPr>
             <a:r>
-              <a:rPr lang="en-US" sz="1200" b="1" dirty="0">
-                <a:solidFill>
-                  <a:srgbClr val="1A1A1A"/>
-                </a:solidFill>
-                <a:latin typeface="Georgia" pitchFamily="34" charset="0"/>
-                <a:ea typeface="Georgia" pitchFamily="34" charset="-122"/>
-                <a:cs typeface="Georgia" pitchFamily="34" charset="-120"/>
-              </a:rPr>
-              <a:t>Tier down:</a:t>
+              <a:rPr lang="en-US" sz="1200" i="1" dirty="0">
+                <a:solidFill>
+                  <a:srgbClr val="1A1A1A"/>
+                </a:solidFill>
+                <a:latin typeface="Georgia" pitchFamily="34" charset="0"/>
+                <a:ea typeface="Georgia" pitchFamily="34" charset="-122"/>
+                <a:cs typeface="Georgia" pitchFamily="34" charset="-120"/>
+              </a:rPr>
+              <a:t>indṛya</a:t>
             </a:r>
             <a:pPr algn="l" indent="0" marL="0">
               <a:lnSpc>
@@ -3188,16 +5575,20 @@
                 <a:ea typeface="Georgia" pitchFamily="34" charset="-122"/>
                 <a:cs typeface="Georgia" pitchFamily="34" charset="-120"/>
               </a:rPr>
-              <a:t> Focus on the </a:t>
-            </a:r>
-            <a:pPr algn="l" indent="0" marL="0">
+              <a:t> = senses</a:t>
+            </a:r>
+            <a:endParaRPr lang="en-US" sz="1200" dirty="0"/>
+          </a:p>
+          <a:p>
+            <a:pPr algn="l" marL="342900" indent="-342900">
               <a:lnSpc>
                 <a:spcPts val="1620"/>
               </a:lnSpc>
               <a:spcAft>
                 <a:spcPts val="300"/>
               </a:spcAft>
-              <a:buNone/>
+              <a:buSzPct val="100000"/>
+              <a:buChar char="•"/>
             </a:pPr>
             <a:r>
               <a:rPr lang="en-US" sz="1200" i="1" dirty="0">
@@ -3208,7 +5599,7 @@
                 <a:ea typeface="Georgia" pitchFamily="34" charset="-122"/>
                 <a:cs typeface="Georgia" pitchFamily="34" charset="-120"/>
               </a:rPr>
-              <a:t>āyu</a:t>
+              <a:t>sattva</a:t>
             </a:r>
             <a:pPr algn="l" indent="0" marL="0">
               <a:lnSpc>
@@ -3228,15 +5619,191 @@
                 <a:ea typeface="Georgia" pitchFamily="34" charset="-122"/>
                 <a:cs typeface="Georgia" pitchFamily="34" charset="-120"/>
               </a:rPr>
-              <a:t> definition; the pramāṇa material is bonus.</a:t>
+              <a:t> = mind</a:t>
             </a:r>
             <a:endParaRPr lang="en-US" sz="1200" dirty="0"/>
           </a:p>
-        </p:txBody>
-      </p:sp>
-      <p:sp>
-        <p:nvSpPr>
-          <p:cNvPr id="5" name="Text 3"/>
+          <a:p>
+            <a:pPr algn="l" marL="342900" indent="-342900">
+              <a:lnSpc>
+                <a:spcPts val="1620"/>
+              </a:lnSpc>
+              <a:spcAft>
+                <a:spcPts val="300"/>
+              </a:spcAft>
+              <a:buSzPct val="100000"/>
+              <a:buChar char="•"/>
+            </a:pPr>
+            <a:r>
+              <a:rPr lang="en-US" sz="1200" i="1" dirty="0">
+                <a:solidFill>
+                  <a:srgbClr val="1A1A1A"/>
+                </a:solidFill>
+                <a:latin typeface="Georgia" pitchFamily="34" charset="0"/>
+                <a:ea typeface="Georgia" pitchFamily="34" charset="-122"/>
+                <a:cs typeface="Georgia" pitchFamily="34" charset="-120"/>
+              </a:rPr>
+              <a:t>ātma</a:t>
+            </a:r>
+            <a:pPr algn="l" indent="0" marL="0">
+              <a:lnSpc>
+                <a:spcPts val="1620"/>
+              </a:lnSpc>
+              <a:spcAft>
+                <a:spcPts val="300"/>
+              </a:spcAft>
+              <a:buNone/>
+            </a:pPr>
+            <a:r>
+              <a:rPr lang="en-US" sz="1200" dirty="0">
+                <a:solidFill>
+                  <a:srgbClr val="1A1A1A"/>
+                </a:solidFill>
+                <a:latin typeface="Georgia" pitchFamily="34" charset="0"/>
+                <a:ea typeface="Georgia" pitchFamily="34" charset="-122"/>
+                <a:cs typeface="Georgia" pitchFamily="34" charset="-120"/>
+              </a:rPr>
+              <a:t> = self</a:t>
+            </a:r>
+            <a:endParaRPr lang="en-US" sz="1200" dirty="0"/>
+          </a:p>
+          <a:p>
+            <a:pPr algn="l" marL="342900" indent="-342900">
+              <a:lnSpc>
+                <a:spcPts val="1620"/>
+              </a:lnSpc>
+              <a:spcAft>
+                <a:spcPts val="300"/>
+              </a:spcAft>
+              <a:buSzPct val="100000"/>
+              <a:buChar char="•"/>
+            </a:pPr>
+            <a:r>
+              <a:rPr lang="en-US" sz="1200" i="1" dirty="0">
+                <a:solidFill>
+                  <a:srgbClr val="1A1A1A"/>
+                </a:solidFill>
+                <a:latin typeface="Georgia" pitchFamily="34" charset="0"/>
+                <a:ea typeface="Georgia" pitchFamily="34" charset="-122"/>
+                <a:cs typeface="Georgia" pitchFamily="34" charset="-120"/>
+              </a:rPr>
+              <a:t>saṁyogo</a:t>
+            </a:r>
+            <a:pPr algn="l" indent="0" marL="0">
+              <a:lnSpc>
+                <a:spcPts val="1620"/>
+              </a:lnSpc>
+              <a:spcAft>
+                <a:spcPts val="300"/>
+              </a:spcAft>
+              <a:buNone/>
+            </a:pPr>
+            <a:r>
+              <a:rPr lang="en-US" sz="1200" dirty="0">
+                <a:solidFill>
+                  <a:srgbClr val="1A1A1A"/>
+                </a:solidFill>
+                <a:latin typeface="Georgia" pitchFamily="34" charset="0"/>
+                <a:ea typeface="Georgia" pitchFamily="34" charset="-122"/>
+                <a:cs typeface="Georgia" pitchFamily="34" charset="-120"/>
+              </a:rPr>
+              <a:t> = conjunction, union</a:t>
+            </a:r>
+            <a:endParaRPr lang="en-US" sz="1200" dirty="0"/>
+          </a:p>
+          <a:p>
+            <a:pPr algn="l" marL="342900" indent="-342900">
+              <a:lnSpc>
+                <a:spcPts val="1620"/>
+              </a:lnSpc>
+              <a:spcAft>
+                <a:spcPts val="300"/>
+              </a:spcAft>
+              <a:buSzPct val="100000"/>
+              <a:buChar char="•"/>
+            </a:pPr>
+            <a:r>
+              <a:rPr lang="en-US" sz="1200" i="1" dirty="0">
+                <a:solidFill>
+                  <a:srgbClr val="1A1A1A"/>
+                </a:solidFill>
+                <a:latin typeface="Georgia" pitchFamily="34" charset="0"/>
+                <a:ea typeface="Georgia" pitchFamily="34" charset="-122"/>
+                <a:cs typeface="Georgia" pitchFamily="34" charset="-120"/>
+              </a:rPr>
+              <a:t>dhāri</a:t>
+            </a:r>
+            <a:pPr algn="l" indent="0" marL="0">
+              <a:lnSpc>
+                <a:spcPts val="1620"/>
+              </a:lnSpc>
+              <a:spcAft>
+                <a:spcPts val="300"/>
+              </a:spcAft>
+              <a:buNone/>
+            </a:pPr>
+            <a:r>
+              <a:rPr lang="en-US" sz="1200" dirty="0">
+                <a:solidFill>
+                  <a:srgbClr val="1A1A1A"/>
+                </a:solidFill>
+                <a:latin typeface="Georgia" pitchFamily="34" charset="0"/>
+                <a:ea typeface="Georgia" pitchFamily="34" charset="-122"/>
+                <a:cs typeface="Georgia" pitchFamily="34" charset="-120"/>
+              </a:rPr>
+              <a:t> = sustainer</a:t>
+            </a:r>
+            <a:endParaRPr lang="en-US" sz="1200" dirty="0"/>
+          </a:p>
+          <a:p>
+            <a:pPr algn="l" marL="342900" indent="-342900">
+              <a:lnSpc>
+                <a:spcPts val="1620"/>
+              </a:lnSpc>
+              <a:spcAft>
+                <a:spcPts val="300"/>
+              </a:spcAft>
+              <a:buSzPct val="100000"/>
+              <a:buChar char="•"/>
+            </a:pPr>
+            <a:r>
+              <a:rPr lang="en-US" sz="1200" i="1" dirty="0">
+                <a:solidFill>
+                  <a:srgbClr val="1A1A1A"/>
+                </a:solidFill>
+                <a:latin typeface="Georgia" pitchFamily="34" charset="0"/>
+                <a:ea typeface="Georgia" pitchFamily="34" charset="-122"/>
+                <a:cs typeface="Georgia" pitchFamily="34" charset="-120"/>
+              </a:rPr>
+              <a:t>jīvitam</a:t>
+            </a:r>
+            <a:pPr algn="l" indent="0" marL="0">
+              <a:lnSpc>
+                <a:spcPts val="1620"/>
+              </a:lnSpc>
+              <a:spcAft>
+                <a:spcPts val="300"/>
+              </a:spcAft>
+              <a:buNone/>
+            </a:pPr>
+            <a:r>
+              <a:rPr lang="en-US" sz="1200" dirty="0">
+                <a:solidFill>
+                  <a:srgbClr val="1A1A1A"/>
+                </a:solidFill>
+                <a:latin typeface="Georgia" pitchFamily="34" charset="0"/>
+                <a:ea typeface="Georgia" pitchFamily="34" charset="-122"/>
+                <a:cs typeface="Georgia" pitchFamily="34" charset="-120"/>
+              </a:rPr>
+              <a:t> = life</a:t>
+            </a:r>
+            <a:endParaRPr lang="en-US" sz="1200" dirty="0"/>
+          </a:p>
+        </p:txBody>
+      </p:sp>
+      <p:sp>
+        <p:nvSpPr>
+          <p:cNvPr id="6" name="Text 4"/>
           <p:cNvSpPr/>
           <p:nvPr/>
         </p:nvSpPr>
@@ -3386,7 +5953,7 @@
                 <a:ea typeface="Times New Roman" pitchFamily="34" charset="-122"/>
                 <a:cs typeface="Times New Roman" pitchFamily="34" charset="-120"/>
               </a:rPr>
-              <a:t>Teacher notes</a:t>
+              <a:t>Reading (25 min) (cont.)</a:t>
             </a:r>
             <a:endParaRPr lang="en-US" sz="1800" dirty="0"/>
           </a:p>
@@ -3426,6 +5993,29 @@
               <a:buNone/>
             </a:pPr>
             <a:r>
+              <a:rPr lang="en-US" sz="1200" b="1" dirty="0">
+                <a:solidFill>
+                  <a:srgbClr val="1A1A1A"/>
+                </a:solidFill>
+                <a:latin typeface="Georgia" pitchFamily="34" charset="0"/>
+                <a:ea typeface="Georgia" pitchFamily="34" charset="-122"/>
+                <a:cs typeface="Georgia" pitchFamily="34" charset="-120"/>
+              </a:rPr>
+              <a:t>Note the move:</a:t>
+            </a:r>
+            <a:pPr algn="l" indent="0" marL="0">
+              <a:lnSpc>
+                <a:spcPts val="1680"/>
+              </a:lnSpc>
+              <a:spcBef>
+                <a:spcPts val="300"/>
+              </a:spcBef>
+              <a:spcAft>
+                <a:spcPts val="300"/>
+              </a:spcAft>
+              <a:buNone/>
+            </a:pPr>
+            <a:r>
               <a:rPr lang="en-US" sz="1200" dirty="0">
                 <a:solidFill>
                   <a:srgbClr val="1A1A1A"/>
@@ -3434,7 +6024,7 @@
                 <a:ea typeface="Georgia" pitchFamily="34" charset="-122"/>
                 <a:cs typeface="Georgia" pitchFamily="34" charset="-120"/>
               </a:rPr>
-              <a:t>– Caraka's text is dense. Don't try to cover everything. The </a:t>
+              <a:t> āyu = body + senses + mind + self. </a:t>
             </a:r>
             <a:pPr algn="l" indent="0" marL="0">
               <a:lnSpc>
@@ -3449,15 +6039,15 @@
               <a:buNone/>
             </a:pPr>
             <a:r>
-              <a:rPr lang="en-US" sz="1200" i="1" dirty="0">
-                <a:solidFill>
-                  <a:srgbClr val="1A1A1A"/>
-                </a:solidFill>
-                <a:latin typeface="Georgia" pitchFamily="34" charset="0"/>
-                <a:ea typeface="Georgia" pitchFamily="34" charset="-122"/>
-                <a:cs typeface="Georgia" pitchFamily="34" charset="-120"/>
-              </a:rPr>
-              <a:t>āyu</a:t>
+              <a:rPr lang="en-US" sz="1200" b="1" dirty="0">
+                <a:solidFill>
+                  <a:srgbClr val="1A1A1A"/>
+                </a:solidFill>
+                <a:latin typeface="Georgia" pitchFamily="34" charset="0"/>
+                <a:ea typeface="Georgia" pitchFamily="34" charset="-122"/>
+                <a:cs typeface="Georgia" pitchFamily="34" charset="-120"/>
+              </a:rPr>
+              <a:t>A four-component definition of life.</a:t>
             </a:r>
             <a:pPr algn="l" indent="0" marL="0">
               <a:lnSpc>
@@ -3480,7 +6070,7 @@
                 <a:ea typeface="Georgia" pitchFamily="34" charset="-122"/>
                 <a:cs typeface="Georgia" pitchFamily="34" charset="-120"/>
               </a:rPr>
-              <a:t> definition + the pramāṇa naming are enough. – The "mind + self" inclusion in life surprises students raised on a body-only definition. Honour the surprise.</a:t>
+              <a:t> Not just biology — includes psychology and the witnessing self.</a:t>
             </a:r>
             <a:endParaRPr lang="en-US" sz="1200" dirty="0"/>
           </a:p>
@@ -3489,6 +6079,72 @@
       <p:sp>
         <p:nvSpPr>
           <p:cNvPr id="5" name="Text 3"/>
+          <p:cNvSpPr/>
+          <p:nvPr/>
+        </p:nvSpPr>
+        <p:spPr>
+          <a:xfrm>
+            <a:off x="634901" y="1386334"/>
+            <a:ext cx="8102798" cy="281880"/>
+          </a:xfrm>
+          <a:prstGeom prst="rect">
+            <a:avLst/>
+          </a:prstGeom>
+          <a:noFill/>
+          <a:ln/>
+        </p:spPr>
+        <p:txBody>
+          <a:bodyPr wrap="square" lIns="0" tIns="0" rIns="0" bIns="0" rtlCol="0" anchor="t"/>
+          <a:lstStyle/>
+          <a:p>
+            <a:pPr algn="l" marL="342900" indent="-342900">
+              <a:lnSpc>
+                <a:spcPts val="1620"/>
+              </a:lnSpc>
+              <a:spcAft>
+                <a:spcPts val="300"/>
+              </a:spcAft>
+              <a:buSzPct val="100000"/>
+              <a:buChar char="•"/>
+            </a:pPr>
+            <a:r>
+              <a:rPr lang="en-US" sz="1200" b="1" dirty="0">
+                <a:solidFill>
+                  <a:srgbClr val="1A1A1A"/>
+                </a:solidFill>
+                <a:latin typeface="Georgia" pitchFamily="34" charset="0"/>
+                <a:ea typeface="Georgia" pitchFamily="34" charset="-122"/>
+                <a:cs typeface="Georgia" pitchFamily="34" charset="-120"/>
+              </a:rPr>
+              <a:t>Caraka's epistemology (Sūtra-sthāna 11).</a:t>
+            </a:r>
+            <a:pPr algn="l" indent="0" marL="0">
+              <a:lnSpc>
+                <a:spcPts val="1620"/>
+              </a:lnSpc>
+              <a:spcAft>
+                <a:spcPts val="300"/>
+              </a:spcAft>
+              <a:buNone/>
+            </a:pPr>
+            <a:r>
+              <a:rPr lang="en-US" sz="1200" dirty="0">
+                <a:solidFill>
+                  <a:srgbClr val="1A1A1A"/>
+                </a:solidFill>
+                <a:latin typeface="Georgia" pitchFamily="34" charset="0"/>
+                <a:ea typeface="Georgia" pitchFamily="34" charset="-122"/>
+                <a:cs typeface="Georgia" pitchFamily="34" charset="-120"/>
+              </a:rPr>
+              <a:t> Three pramāṇas (means of valid knowledge):</a:t>
+            </a:r>
+            <a:endParaRPr lang="en-US" sz="1200" dirty="0"/>
+          </a:p>
+        </p:txBody>
+      </p:sp>
+      <p:sp>
+        <p:nvSpPr>
+          <p:cNvPr id="6" name="Text 4"/>
           <p:cNvSpPr/>
           <p:nvPr/>
         </p:nvSpPr>
@@ -3638,7 +6294,7 @@
                 <a:ea typeface="Times New Roman" pitchFamily="34" charset="-122"/>
                 <a:cs typeface="Times New Roman" pitchFamily="34" charset="-120"/>
               </a:rPr>
-              <a:t>Citation(s) used</a:t>
+              <a:t>Reading (25 min) (cont.)</a:t>
             </a:r>
             <a:endParaRPr lang="en-US" sz="1800" dirty="0"/>
           </a:p>
@@ -3652,8 +6308,8 @@
         </p:nvSpPr>
         <p:spPr>
           <a:xfrm>
-            <a:off x="406301" y="870942"/>
-            <a:ext cx="8498026" cy="213271"/>
+            <a:off x="634901" y="883593"/>
+            <a:ext cx="8102798" cy="769441"/>
           </a:xfrm>
           <a:prstGeom prst="rect">
             <a:avLst/>
@@ -3665,13 +6321,31 @@
           <a:bodyPr wrap="square" lIns="0" tIns="0" rIns="0" bIns="0" rtlCol="0" anchor="t"/>
           <a:lstStyle/>
           <a:p>
-            <a:pPr algn="l" indent="0" marL="0">
-              <a:lnSpc>
-                <a:spcPts val="1680"/>
-              </a:lnSpc>
-              <a:spcBef>
-                <a:spcPts val="300"/>
-              </a:spcBef>
+            <a:pPr algn="l" marL="342900" indent="-342900">
+              <a:lnSpc>
+                <a:spcPts val="1620"/>
+              </a:lnSpc>
+              <a:spcAft>
+                <a:spcPts val="300"/>
+              </a:spcAft>
+              <a:buSzPct val="100000"/>
+              <a:buChar char="•"/>
+            </a:pPr>
+            <a:r>
+              <a:rPr lang="en-US" sz="1200" i="1" dirty="0">
+                <a:solidFill>
+                  <a:srgbClr val="1A1A1A"/>
+                </a:solidFill>
+                <a:latin typeface="Georgia" pitchFamily="34" charset="0"/>
+                <a:ea typeface="Georgia" pitchFamily="34" charset="-122"/>
+                <a:cs typeface="Georgia" pitchFamily="34" charset="-120"/>
+              </a:rPr>
+              <a:t>Āpta-upadeśa</a:t>
+            </a:r>
+            <a:pPr algn="l" indent="0" marL="0">
+              <a:lnSpc>
+                <a:spcPts val="1620"/>
+              </a:lnSpc>
               <a:spcAft>
                 <a:spcPts val="300"/>
               </a:spcAft>
@@ -3686,7 +6360,95 @@
                 <a:ea typeface="Georgia" pitchFamily="34" charset="-122"/>
                 <a:cs typeface="Georgia" pitchFamily="34" charset="-120"/>
               </a:rPr>
-              <a:t>– Caraka Sūtra-sthāna 1.42 — Sharma (1981).</a:t>
+              <a:t> — authoritative teaching (testimony)</a:t>
+            </a:r>
+            <a:endParaRPr lang="en-US" sz="1200" dirty="0"/>
+          </a:p>
+          <a:p>
+            <a:pPr algn="l" marL="342900" indent="-342900">
+              <a:lnSpc>
+                <a:spcPts val="1620"/>
+              </a:lnSpc>
+              <a:spcAft>
+                <a:spcPts val="300"/>
+              </a:spcAft>
+              <a:buSzPct val="100000"/>
+              <a:buChar char="•"/>
+            </a:pPr>
+            <a:r>
+              <a:rPr lang="en-US" sz="1200" i="1" dirty="0">
+                <a:solidFill>
+                  <a:srgbClr val="1A1A1A"/>
+                </a:solidFill>
+                <a:latin typeface="Georgia" pitchFamily="34" charset="0"/>
+                <a:ea typeface="Georgia" pitchFamily="34" charset="-122"/>
+                <a:cs typeface="Georgia" pitchFamily="34" charset="-120"/>
+              </a:rPr>
+              <a:t>Pratyakṣa</a:t>
+            </a:r>
+            <a:pPr algn="l" indent="0" marL="0">
+              <a:lnSpc>
+                <a:spcPts val="1620"/>
+              </a:lnSpc>
+              <a:spcAft>
+                <a:spcPts val="300"/>
+              </a:spcAft>
+              <a:buNone/>
+            </a:pPr>
+            <a:r>
+              <a:rPr lang="en-US" sz="1200" dirty="0">
+                <a:solidFill>
+                  <a:srgbClr val="1A1A1A"/>
+                </a:solidFill>
+                <a:latin typeface="Georgia" pitchFamily="34" charset="0"/>
+                <a:ea typeface="Georgia" pitchFamily="34" charset="-122"/>
+                <a:cs typeface="Georgia" pitchFamily="34" charset="-120"/>
+              </a:rPr>
+              <a:t> — direct perception</a:t>
+            </a:r>
+            <a:endParaRPr lang="en-US" sz="1200" dirty="0"/>
+          </a:p>
+          <a:p>
+            <a:pPr algn="l" marL="342900" indent="-342900">
+              <a:lnSpc>
+                <a:spcPts val="1620"/>
+              </a:lnSpc>
+              <a:spcAft>
+                <a:spcPts val="300"/>
+              </a:spcAft>
+              <a:buSzPct val="100000"/>
+              <a:buChar char="•"/>
+            </a:pPr>
+            <a:r>
+              <a:rPr lang="en-US" sz="1200" i="1" dirty="0">
+                <a:solidFill>
+                  <a:srgbClr val="1A1A1A"/>
+                </a:solidFill>
+                <a:latin typeface="Georgia" pitchFamily="34" charset="0"/>
+                <a:ea typeface="Georgia" pitchFamily="34" charset="-122"/>
+                <a:cs typeface="Georgia" pitchFamily="34" charset="-120"/>
+              </a:rPr>
+              <a:t>Anumāna</a:t>
+            </a:r>
+            <a:pPr algn="l" indent="0" marL="0">
+              <a:lnSpc>
+                <a:spcPts val="1620"/>
+              </a:lnSpc>
+              <a:spcAft>
+                <a:spcPts val="300"/>
+              </a:spcAft>
+              <a:buNone/>
+            </a:pPr>
+            <a:r>
+              <a:rPr lang="en-US" sz="1200" dirty="0">
+                <a:solidFill>
+                  <a:srgbClr val="1A1A1A"/>
+                </a:solidFill>
+                <a:latin typeface="Georgia" pitchFamily="34" charset="0"/>
+                <a:ea typeface="Georgia" pitchFamily="34" charset="-122"/>
+                <a:cs typeface="Georgia" pitchFamily="34" charset="-120"/>
+              </a:rPr>
+              <a:t> — inference</a:t>
             </a:r>
             <a:endParaRPr lang="en-US" sz="1200" dirty="0"/>
           </a:p>
@@ -3700,8 +6462,8 @@
         </p:nvSpPr>
         <p:spPr>
           <a:xfrm>
-            <a:off x="634901" y="1173063"/>
-            <a:ext cx="8102798" cy="300930"/>
+            <a:off x="406301" y="1741884"/>
+            <a:ext cx="8498026" cy="426541"/>
           </a:xfrm>
           <a:prstGeom prst="rect">
             <a:avLst/>
@@ -3713,15 +6475,17 @@
           <a:bodyPr wrap="square" lIns="0" tIns="0" rIns="0" bIns="0" rtlCol="0" anchor="t"/>
           <a:lstStyle/>
           <a:p>
-            <a:pPr algn="l" marL="342900" indent="-342900">
-              <a:lnSpc>
-                <a:spcPts val="1620"/>
-              </a:lnSpc>
-              <a:spcAft>
-                <a:spcPts val="300"/>
-              </a:spcAft>
-              <a:buSzPct val="100000"/>
-              <a:buChar char="•"/>
+            <a:pPr algn="l" indent="0" marL="0">
+              <a:lnSpc>
+                <a:spcPts val="1680"/>
+              </a:lnSpc>
+              <a:spcBef>
+                <a:spcPts val="300"/>
+              </a:spcBef>
+              <a:spcAft>
+                <a:spcPts val="300"/>
+              </a:spcAft>
+              <a:buNone/>
             </a:pPr>
             <a:r>
               <a:rPr lang="en-US" sz="1200" dirty="0">
@@ -3732,47 +6496,7 @@
                 <a:ea typeface="Georgia" pitchFamily="34" charset="-122"/>
                 <a:cs typeface="Georgia" pitchFamily="34" charset="-120"/>
               </a:rPr>
-              <a:t>vidya-karana RAG </a:t>
-            </a:r>
-            <a:pPr algn="l" indent="0" marL="0">
-              <a:lnSpc>
-                <a:spcPts val="1620"/>
-              </a:lnSpc>
-              <a:spcAft>
-                <a:spcPts val="300"/>
-              </a:spcAft>
-              <a:buNone/>
-            </a:pPr>
-            <a:r>
-              <a:rPr lang="en-US" sz="1200" dirty="0">
-                <a:solidFill>
-                  <a:srgbClr val="1A1A1A"/>
-                </a:solidFill>
-                <a:latin typeface="Georgia" pitchFamily="34" charset="0"/>
-                <a:ea typeface="Georgia" pitchFamily="34" charset="-122"/>
-                <a:cs typeface="Georgia" pitchFamily="34" charset="-120"/>
-              </a:rPr>
-              <a:t>day-01-intro.json</a:t>
-            </a:r>
-            <a:pPr algn="l" indent="0" marL="0">
-              <a:lnSpc>
-                <a:spcPts val="1620"/>
-              </a:lnSpc>
-              <a:spcAft>
-                <a:spcPts val="300"/>
-              </a:spcAft>
-              <a:buNone/>
-            </a:pPr>
-            <a:r>
-              <a:rPr lang="en-US" sz="1200" dirty="0">
-                <a:solidFill>
-                  <a:srgbClr val="1A1A1A"/>
-                </a:solidFill>
-                <a:latin typeface="Georgia" pitchFamily="34" charset="0"/>
-                <a:ea typeface="Georgia" pitchFamily="34" charset="-122"/>
-                <a:cs typeface="Georgia" pitchFamily="34" charset="-120"/>
-              </a:rPr>
-              <a:t> for supporting Bhagavad-gītā references.</a:t>
+              <a:t>Note: this is essentially the same epistemological framework that the Nyāya school formalised (with one additional pramāṇa — comparison). Caraka was working within an articulated philosophy of knowledge.</a:t>
             </a:r>
             <a:endParaRPr lang="en-US" sz="1200" dirty="0"/>
           </a:p>
